--- a/paolo.spallanzani.pptx
+++ b/paolo.spallanzani.pptx
@@ -9584,7 +9584,40 @@
                 <a:ea typeface="Calibri" pitchFamily="34" charset="-122"/>
                 <a:cs typeface="Calibri" pitchFamily="34" charset="-120"/>
               </a:rPr>
-              <a:t>Results metrics and baselines</a:t>
+              <a:t>Results </a:t>
+            </a:r>
+            <a:r>
+              <a:rPr lang="en-US" sz="2600" b="1">
+                <a:solidFill>
+                  <a:srgbClr val="1A1A1A"/>
+                </a:solidFill>
+                <a:latin typeface="Calibri" pitchFamily="34" charset="0"/>
+                <a:ea typeface="Calibri" pitchFamily="34" charset="-122"/>
+                <a:cs typeface="Calibri" pitchFamily="34" charset="-120"/>
+              </a:rPr>
+              <a:t>Metrics &amp; </a:t>
+            </a:r>
+            <a:r>
+              <a:rPr lang="en-US" sz="2600" b="1" dirty="0">
+                <a:solidFill>
+                  <a:srgbClr val="1A1A1A"/>
+                </a:solidFill>
+                <a:latin typeface="Calibri" pitchFamily="34" charset="0"/>
+                <a:ea typeface="Calibri" pitchFamily="34" charset="-122"/>
+                <a:cs typeface="Calibri" pitchFamily="34" charset="-120"/>
+              </a:rPr>
+              <a:t>B</a:t>
+            </a:r>
+            <a:r>
+              <a:rPr lang="en-US" sz="2600" b="1">
+                <a:solidFill>
+                  <a:srgbClr val="1A1A1A"/>
+                </a:solidFill>
+                <a:latin typeface="Calibri" pitchFamily="34" charset="0"/>
+                <a:ea typeface="Calibri" pitchFamily="34" charset="-122"/>
+                <a:cs typeface="Calibri" pitchFamily="34" charset="-120"/>
+              </a:rPr>
+              <a:t>aselines</a:t>
             </a:r>
             <a:endParaRPr lang="en-US" sz="2600" dirty="0"/>
           </a:p>
@@ -13250,53 +13283,14 @@
       </p:sp>
       <p:sp>
         <p:nvSpPr>
-          <p:cNvPr id="2" name="Text 0"/>
-          <p:cNvSpPr/>
-          <p:nvPr/>
-        </p:nvSpPr>
-        <p:spPr>
-          <a:xfrm>
-            <a:off x="320040" y="4846320"/>
-            <a:ext cx="7772400" cy="201168"/>
-          </a:xfrm>
-          <a:prstGeom prst="rect">
-            <a:avLst/>
-          </a:prstGeom>
-          <a:noFill/>
-          <a:ln/>
-        </p:spPr>
-        <p:txBody>
-          <a:bodyPr wrap="square" rtlCol="0" anchor="ctr"/>
-          <a:lstStyle/>
-          <a:p>
-            <a:pPr marL="0" indent="0" algn="l">
-              <a:buNone/>
-            </a:pPr>
-            <a:r>
-              <a:rPr lang="en-US" sz="900" dirty="0">
-                <a:solidFill>
-                  <a:srgbClr val="BBBBBB"/>
-                </a:solidFill>
-                <a:latin typeface="Calibri" pitchFamily="34" charset="0"/>
-                <a:ea typeface="Calibri" pitchFamily="34" charset="-122"/>
-                <a:cs typeface="Calibri" pitchFamily="34" charset="-120"/>
-              </a:rPr>
-              <a:t>Paolo Spallanzani  ·  Deep RL in Frontier-Based Autonomous Exploration</a:t>
-            </a:r>
-            <a:endParaRPr lang="en-US" sz="900" dirty="0"/>
-          </a:p>
-        </p:txBody>
-      </p:sp>
-      <p:sp>
-        <p:nvSpPr>
           <p:cNvPr id="3" name="Text 1"/>
           <p:cNvSpPr/>
           <p:nvPr/>
         </p:nvSpPr>
         <p:spPr>
           <a:xfrm>
-            <a:off x="8412480" y="4846320"/>
-            <a:ext cx="457200" cy="201168"/>
+            <a:off x="8315325" y="4773168"/>
+            <a:ext cx="554355" cy="274320"/>
           </a:xfrm>
           <a:prstGeom prst="rect">
             <a:avLst/>
@@ -13690,8 +13684,8 @@
           </a:p>
         </p:txBody>
       </p:sp>
-      <mc:AlternateContent xmlns:mc="http://schemas.openxmlformats.org/markup-compatibility/2006">
-        <mc:Choice xmlns:a14="http://schemas.microsoft.com/office/drawing/2010/main" Requires="a14">
+      <mc:AlternateContent xmlns:mc="http://schemas.openxmlformats.org/markup-compatibility/2006" xmlns:a14="http://schemas.microsoft.com/office/drawing/2010/main">
+        <mc:Choice Requires="a14">
           <p:sp>
             <p:nvSpPr>
               <p:cNvPr id="21" name="Text 8">
@@ -13863,7 +13857,7 @@
             </p:txBody>
           </p:sp>
         </mc:Choice>
-        <mc:Fallback>
+        <mc:Fallback xmlns="">
           <p:sp>
             <p:nvSpPr>
               <p:cNvPr id="21" name="Text 8">
@@ -25113,8 +25107,8 @@
           </a:p>
         </p:txBody>
       </p:sp>
-      <mc:AlternateContent xmlns:mc="http://schemas.openxmlformats.org/markup-compatibility/2006">
-        <mc:Choice xmlns:a14="http://schemas.microsoft.com/office/drawing/2010/main" Requires="a14">
+      <mc:AlternateContent xmlns:mc="http://schemas.openxmlformats.org/markup-compatibility/2006" xmlns:a14="http://schemas.microsoft.com/office/drawing/2010/main">
+        <mc:Choice Requires="a14">
           <p:sp>
             <p:nvSpPr>
               <p:cNvPr id="9" name="Text 8">
@@ -25783,7 +25777,7 @@
             </p:txBody>
           </p:sp>
         </mc:Choice>
-        <mc:Fallback>
+        <mc:Fallback xmlns="">
           <p:sp>
             <p:nvSpPr>
               <p:cNvPr id="9" name="Text 8">
@@ -26234,8 +26228,8 @@
           </a:prstGeom>
         </p:spPr>
       </p:pic>
-      <mc:AlternateContent xmlns:mc="http://schemas.openxmlformats.org/markup-compatibility/2006">
-        <mc:Choice xmlns:a14="http://schemas.microsoft.com/office/drawing/2010/main" Requires="a14">
+      <mc:AlternateContent xmlns:mc="http://schemas.openxmlformats.org/markup-compatibility/2006" xmlns:a14="http://schemas.microsoft.com/office/drawing/2010/main">
+        <mc:Choice Requires="a14">
           <p:sp>
             <p:nvSpPr>
               <p:cNvPr id="15" name="Text 8">
@@ -26401,7 +26395,7 @@
             </p:txBody>
           </p:sp>
         </mc:Choice>
-        <mc:Fallback>
+        <mc:Fallback xmlns="">
           <p:sp>
             <p:nvSpPr>
               <p:cNvPr id="15" name="Text 8">

--- a/paolo.spallanzani.pptx
+++ b/paolo.spallanzani.pptx
@@ -4117,7 +4117,7 @@
             <a:avLst/>
           </a:prstGeom>
           <a:solidFill>
-            <a:srgbClr val="F5F7FA"/>
+            <a:srgbClr val="D6E4F0"/>
           </a:solidFill>
           <a:ln w="12700">
             <a:solidFill>
@@ -4738,7 +4738,7 @@
             <a:avLst/>
           </a:prstGeom>
           <a:solidFill>
-            <a:srgbClr val="F5F7FA"/>
+            <a:srgbClr val="D6E4F0"/>
           </a:solidFill>
           <a:ln w="12700">
             <a:solidFill>
@@ -4910,7 +4910,7 @@
                 <a:ea typeface="Calibri" pitchFamily="34" charset="-122"/>
                 <a:cs typeface="Calibri" pitchFamily="34" charset="-120"/>
               </a:rPr>
-              <a:t>distance</a:t>
+              <a:t>Distance&gt;</a:t>
             </a:r>
             <a:endParaRPr lang="en-US" sz="1300" dirty="0"/>
           </a:p>
@@ -4976,7 +4976,7 @@
             <a:avLst/>
           </a:prstGeom>
           <a:solidFill>
-            <a:srgbClr val="F5F7FA"/>
+            <a:srgbClr val="D6E4F0"/>
           </a:solidFill>
           <a:ln w="12700">
             <a:solidFill>
@@ -13264,8 +13264,8 @@
         </p:nvSpPr>
         <p:spPr>
           <a:xfrm>
-            <a:off x="692944" y="1178432"/>
-            <a:ext cx="7719536" cy="1318640"/>
+            <a:off x="692944" y="956968"/>
+            <a:ext cx="7719536" cy="1187477"/>
           </a:xfrm>
           <a:prstGeom prst="rect">
             <a:avLst/>
@@ -13415,8 +13415,8 @@
         </p:nvSpPr>
         <p:spPr>
           <a:xfrm>
-            <a:off x="838682" y="1371600"/>
-            <a:ext cx="8229600" cy="274320"/>
+            <a:off x="838682" y="1085840"/>
+            <a:ext cx="7233756" cy="274320"/>
           </a:xfrm>
           <a:prstGeom prst="rect">
             <a:avLst/>
@@ -13454,7 +13454,7 @@
         </p:nvSpPr>
         <p:spPr>
           <a:xfrm>
-            <a:off x="838681" y="1664208"/>
+            <a:off x="838681" y="1378448"/>
             <a:ext cx="4379601" cy="665227"/>
           </a:xfrm>
           <a:prstGeom prst="rect">
@@ -13524,8 +13524,8 @@
         </p:nvSpPr>
         <p:spPr>
           <a:xfrm>
-            <a:off x="5926934" y="1793464"/>
-            <a:ext cx="2857500" cy="341376"/>
+            <a:off x="5693568" y="1373296"/>
+            <a:ext cx="2557462" cy="341376"/>
           </a:xfrm>
           <a:prstGeom prst="rect">
             <a:avLst/>
@@ -13537,7 +13537,7 @@
           <a:bodyPr wrap="square" rtlCol="0" anchor="t"/>
           <a:lstStyle/>
           <a:p>
-            <a:pPr>
+            <a:pPr algn="ctr">
               <a:spcAft>
                 <a:spcPts val="500"/>
               </a:spcAft>
@@ -13552,7 +13552,7 @@
                 <a:ea typeface="Calibri" pitchFamily="34" charset="-122"/>
                 <a:cs typeface="Calibri" pitchFamily="34" charset="-120"/>
               </a:rPr>
-              <a:t>Degenerated Policy</a:t>
+              <a:t>Not meaningfully learning from observations</a:t>
             </a:r>
           </a:p>
         </p:txBody>
@@ -13573,7 +13573,7 @@
         </p:nvCxnSpPr>
         <p:spPr>
           <a:xfrm>
-            <a:off x="5400674" y="1958340"/>
+            <a:off x="5243508" y="1672580"/>
             <a:ext cx="386728" cy="0"/>
           </a:xfrm>
           <a:prstGeom prst="straightConnector1">
@@ -13615,8 +13615,8 @@
         </p:nvSpPr>
         <p:spPr>
           <a:xfrm>
-            <a:off x="692944" y="2844164"/>
-            <a:ext cx="7719536" cy="1522096"/>
+            <a:off x="692944" y="2301221"/>
+            <a:ext cx="7719536" cy="1104743"/>
           </a:xfrm>
           <a:prstGeom prst="rect">
             <a:avLst/>
@@ -13653,8 +13653,8 @@
         </p:nvSpPr>
         <p:spPr>
           <a:xfrm>
-            <a:off x="838682" y="3037332"/>
-            <a:ext cx="8229600" cy="274320"/>
+            <a:off x="838682" y="2387229"/>
+            <a:ext cx="7133743" cy="274320"/>
           </a:xfrm>
           <a:prstGeom prst="rect">
             <a:avLst/>
@@ -13684,8 +13684,8 @@
           </a:p>
         </p:txBody>
       </p:sp>
-      <mc:AlternateContent xmlns:mc="http://schemas.openxmlformats.org/markup-compatibility/2006" xmlns:a14="http://schemas.microsoft.com/office/drawing/2010/main">
-        <mc:Choice Requires="a14">
+      <mc:AlternateContent xmlns:mc="http://schemas.openxmlformats.org/markup-compatibility/2006">
+        <mc:Choice xmlns:a14="http://schemas.microsoft.com/office/drawing/2010/main" Requires="a14">
           <p:sp>
             <p:nvSpPr>
               <p:cNvPr id="21" name="Text 8">
@@ -13700,7 +13700,7 @@
             </p:nvSpPr>
             <p:spPr>
               <a:xfrm>
-                <a:off x="838682" y="3329940"/>
+                <a:off x="838682" y="2679837"/>
                 <a:ext cx="7536180" cy="665227"/>
               </a:xfrm>
               <a:prstGeom prst="rect">
@@ -13834,30 +13834,10 @@
                   <a:t> correspond to the greedy heuristic</a:t>
                 </a:r>
               </a:p>
-              <a:p>
-                <a:pPr marL="190500" indent="-190500">
-                  <a:spcAft>
-                    <a:spcPts val="500"/>
-                  </a:spcAft>
-                  <a:buSzPct val="100000"/>
-                  <a:buChar char="•"/>
-                </a:pPr>
-                <a:r>
-                  <a:rPr lang="en-US" sz="1600" dirty="0">
-                    <a:solidFill>
-                      <a:srgbClr val="1A1A1A"/>
-                    </a:solidFill>
-                    <a:latin typeface="Calibri" pitchFamily="34" charset="0"/>
-                    <a:ea typeface="Calibri" pitchFamily="34" charset="-122"/>
-                    <a:cs typeface="Calibri" pitchFamily="34" charset="-120"/>
-                  </a:rPr>
-                  <a:t>Not meaningfully learning from observations</a:t>
-                </a:r>
-              </a:p>
             </p:txBody>
           </p:sp>
         </mc:Choice>
-        <mc:Fallback xmlns="">
+        <mc:Fallback>
           <p:sp>
             <p:nvSpPr>
               <p:cNvPr id="21" name="Text 8">
@@ -13874,7 +13854,7 @@
             </p:nvSpPr>
             <p:spPr>
               <a:xfrm>
-                <a:off x="838682" y="3329940"/>
+                <a:off x="838682" y="2679837"/>
                 <a:ext cx="7536180" cy="665227"/>
               </a:xfrm>
               <a:prstGeom prst="rect">
@@ -13883,7 +13863,7 @@
               <a:blipFill>
                 <a:blip r:embed="rId3"/>
                 <a:stretch>
-                  <a:fillRect l="-485" t="-2752" b="-55046"/>
+                  <a:fillRect l="-485" t="-2752" b="-9174"/>
                 </a:stretch>
               </a:blipFill>
               <a:ln/>
@@ -13903,6 +13883,179 @@
           </p:sp>
         </mc:Fallback>
       </mc:AlternateContent>
+      <p:sp>
+        <p:nvSpPr>
+          <p:cNvPr id="2" name="Shape 9">
+            <a:extLst>
+              <a:ext uri="{FF2B5EF4-FFF2-40B4-BE49-F238E27FC236}">
+                <a16:creationId xmlns:a16="http://schemas.microsoft.com/office/drawing/2014/main" id="{41A7ACDA-36AA-A884-BFA6-282D67B931BB}"/>
+              </a:ext>
+            </a:extLst>
+          </p:cNvPr>
+          <p:cNvSpPr/>
+          <p:nvPr/>
+        </p:nvSpPr>
+        <p:spPr>
+          <a:xfrm>
+            <a:off x="707232" y="3560417"/>
+            <a:ext cx="7719536" cy="936581"/>
+          </a:xfrm>
+          <a:prstGeom prst="rect">
+            <a:avLst/>
+          </a:prstGeom>
+          <a:solidFill>
+            <a:srgbClr val="F0F8F0"/>
+          </a:solidFill>
+          <a:ln w="12700">
+            <a:solidFill>
+              <a:srgbClr val="4CAF50"/>
+            </a:solidFill>
+            <a:prstDash val="solid"/>
+          </a:ln>
+        </p:spPr>
+      </p:sp>
+      <p:sp>
+        <p:nvSpPr>
+          <p:cNvPr id="7" name="Text 10">
+            <a:extLst>
+              <a:ext uri="{FF2B5EF4-FFF2-40B4-BE49-F238E27FC236}">
+                <a16:creationId xmlns:a16="http://schemas.microsoft.com/office/drawing/2014/main" id="{CCA0CA91-892A-CD4C-B72A-8B86041F787B}"/>
+              </a:ext>
+            </a:extLst>
+          </p:cNvPr>
+          <p:cNvSpPr/>
+          <p:nvPr/>
+        </p:nvSpPr>
+        <p:spPr>
+          <a:xfrm>
+            <a:off x="852970" y="3624159"/>
+            <a:ext cx="7033731" cy="274320"/>
+          </a:xfrm>
+          <a:prstGeom prst="rect">
+            <a:avLst/>
+          </a:prstGeom>
+          <a:noFill/>
+          <a:ln/>
+        </p:spPr>
+        <p:txBody>
+          <a:bodyPr wrap="square" rtlCol="0" anchor="ctr"/>
+          <a:lstStyle/>
+          <a:p>
+            <a:pPr marL="0" indent="0">
+              <a:buNone/>
+            </a:pPr>
+            <a:r>
+              <a:rPr lang="en-US" sz="1600" b="1" dirty="0">
+                <a:solidFill>
+                  <a:srgbClr val="2E7D32"/>
+                </a:solidFill>
+                <a:latin typeface="Calibri" pitchFamily="34" charset="0"/>
+                <a:ea typeface="Calibri" pitchFamily="34" charset="-122"/>
+                <a:cs typeface="Calibri" pitchFamily="34" charset="-120"/>
+              </a:rPr>
+              <a:t>Attempted fixes</a:t>
+            </a:r>
+            <a:endParaRPr lang="en-US" sz="1600" dirty="0"/>
+          </a:p>
+        </p:txBody>
+      </p:sp>
+      <p:sp>
+        <p:nvSpPr>
+          <p:cNvPr id="8" name="Text 11">
+            <a:extLst>
+              <a:ext uri="{FF2B5EF4-FFF2-40B4-BE49-F238E27FC236}">
+                <a16:creationId xmlns:a16="http://schemas.microsoft.com/office/drawing/2014/main" id="{A4C249C0-D8D3-521C-D456-0E36EAED184A}"/>
+              </a:ext>
+            </a:extLst>
+          </p:cNvPr>
+          <p:cNvSpPr/>
+          <p:nvPr/>
+        </p:nvSpPr>
+        <p:spPr>
+          <a:xfrm>
+            <a:off x="1147291" y="3935055"/>
+            <a:ext cx="2533174" cy="424813"/>
+          </a:xfrm>
+          <a:prstGeom prst="rect">
+            <a:avLst/>
+          </a:prstGeom>
+          <a:noFill/>
+          <a:ln/>
+        </p:spPr>
+        <p:txBody>
+          <a:bodyPr wrap="square" rtlCol="0" anchor="t"/>
+          <a:lstStyle/>
+          <a:p>
+            <a:pPr marL="190500" indent="-190500">
+              <a:spcAft>
+                <a:spcPts val="500"/>
+              </a:spcAft>
+              <a:buSzPct val="100000"/>
+              <a:buChar char="•"/>
+            </a:pPr>
+            <a:r>
+              <a:rPr lang="en-US" sz="1600" dirty="0">
+                <a:solidFill>
+                  <a:srgbClr val="1A1A1A"/>
+                </a:solidFill>
+                <a:latin typeface="Calibri" pitchFamily="34" charset="0"/>
+                <a:ea typeface="Calibri" pitchFamily="34" charset="-122"/>
+                <a:cs typeface="Calibri" pitchFamily="34" charset="-120"/>
+              </a:rPr>
+              <a:t>Remove distance sorting </a:t>
+            </a:r>
+          </a:p>
+        </p:txBody>
+      </p:sp>
+      <p:sp>
+        <p:nvSpPr>
+          <p:cNvPr id="11" name="Text 11">
+            <a:extLst>
+              <a:ext uri="{FF2B5EF4-FFF2-40B4-BE49-F238E27FC236}">
+                <a16:creationId xmlns:a16="http://schemas.microsoft.com/office/drawing/2014/main" id="{5D4DEA9B-2DB3-306E-FA16-B1A2198BD0A1}"/>
+              </a:ext>
+            </a:extLst>
+          </p:cNvPr>
+          <p:cNvSpPr/>
+          <p:nvPr/>
+        </p:nvSpPr>
+        <p:spPr>
+          <a:xfrm>
+            <a:off x="4735835" y="3910573"/>
+            <a:ext cx="2533174" cy="439008"/>
+          </a:xfrm>
+          <a:prstGeom prst="rect">
+            <a:avLst/>
+          </a:prstGeom>
+          <a:noFill/>
+          <a:ln/>
+        </p:spPr>
+        <p:txBody>
+          <a:bodyPr wrap="square" rtlCol="0" anchor="t"/>
+          <a:lstStyle/>
+          <a:p>
+            <a:pPr marL="190500" indent="-190500">
+              <a:spcAft>
+                <a:spcPts val="500"/>
+              </a:spcAft>
+              <a:buSzPct val="100000"/>
+              <a:buChar char="•"/>
+            </a:pPr>
+            <a:r>
+              <a:rPr lang="en-US" sz="1600" dirty="0">
+                <a:solidFill>
+                  <a:srgbClr val="1A1A1A"/>
+                </a:solidFill>
+                <a:latin typeface="Calibri" pitchFamily="34" charset="0"/>
+                <a:ea typeface="Calibri" pitchFamily="34" charset="-122"/>
+                <a:cs typeface="Calibri" pitchFamily="34" charset="-120"/>
+              </a:rPr>
+              <a:t>Soften padding penalty</a:t>
+            </a:r>
+            <a:endParaRPr lang="en-US" sz="1600" dirty="0"/>
+          </a:p>
+        </p:txBody>
+      </p:sp>
     </p:spTree>
   </p:cSld>
   <p:clrMapOvr>
@@ -18074,7 +18227,7 @@
             <a:avLst/>
           </a:prstGeom>
           <a:solidFill>
-            <a:srgbClr val="F5F7FA"/>
+            <a:srgbClr val="D6E4F0"/>
           </a:solidFill>
           <a:ln w="12700">
             <a:solidFill>
@@ -18646,7 +18799,7 @@
             <a:avLst/>
           </a:prstGeom>
           <a:solidFill>
-            <a:srgbClr val="F5F7FA"/>
+            <a:srgbClr val="D6E4F0"/>
           </a:solidFill>
           <a:ln w="12700">
             <a:solidFill>
@@ -18811,7 +18964,7 @@
             <a:avLst/>
           </a:prstGeom>
           <a:solidFill>
-            <a:srgbClr val="F5F7FA"/>
+            <a:srgbClr val="D6E4F0"/>
           </a:solidFill>
           <a:ln w="12700">
             <a:solidFill>
@@ -19053,8 +19206,8 @@
           </a:p>
         </p:txBody>
       </p:sp>
-      <mc:AlternateContent xmlns:mc="http://schemas.openxmlformats.org/markup-compatibility/2006" xmlns:a14="http://schemas.microsoft.com/office/drawing/2010/main">
-        <mc:Choice Requires="a14">
+      <mc:AlternateContent xmlns:mc="http://schemas.openxmlformats.org/markup-compatibility/2006">
+        <mc:Choice xmlns:a14="http://schemas.microsoft.com/office/drawing/2010/main" Requires="a14">
           <p:graphicFrame>
             <p:nvGraphicFramePr>
               <p:cNvPr id="16" name="Table 0"/>
@@ -19064,7 +19217,7 @@
               <p:nvPr>
                 <p:extLst>
                   <p:ext uri="{D42A27DB-BD31-4B8C-83A1-F6EECF244321}">
-                    <p14:modId xmlns:p14="http://schemas.microsoft.com/office/powerpoint/2010/main" val="89543725"/>
+                    <p14:modId xmlns:p14="http://schemas.microsoft.com/office/powerpoint/2010/main" val="316345146"/>
                   </p:ext>
                 </p:extLst>
               </p:nvPr>
@@ -19600,9 +19753,7 @@
                           <a:headEnd type="none" w="med" len="med"/>
                           <a:tailEnd type="none" w="med" len="med"/>
                         </a:lnB>
-                        <a:solidFill>
-                          <a:srgbClr val="EEF4FB"/>
-                        </a:solidFill>
+                        <a:noFill/>
                       </a:tcPr>
                     </a:tc>
                     <a:tc>
@@ -19668,9 +19819,7 @@
                           <a:headEnd type="none" w="med" len="med"/>
                           <a:tailEnd type="none" w="med" len="med"/>
                         </a:lnB>
-                        <a:solidFill>
-                          <a:srgbClr val="EEF4FB"/>
-                        </a:solidFill>
+                        <a:noFill/>
                       </a:tcPr>
                     </a:tc>
                     <a:tc>
@@ -19736,9 +19885,7 @@
                           <a:headEnd type="none" w="med" len="med"/>
                           <a:tailEnd type="none" w="med" len="med"/>
                         </a:lnB>
-                        <a:solidFill>
-                          <a:srgbClr val="EEF4FB"/>
-                        </a:solidFill>
+                        <a:noFill/>
                       </a:tcPr>
                     </a:tc>
                     <a:tc>
@@ -19831,9 +19978,7 @@
                           <a:headEnd type="none" w="med" len="med"/>
                           <a:tailEnd type="none" w="med" len="med"/>
                         </a:lnB>
-                        <a:solidFill>
-                          <a:srgbClr val="EEF4FB"/>
-                        </a:solidFill>
+                        <a:noFill/>
                       </a:tcPr>
                     </a:tc>
                     <a:tc>
@@ -19915,9 +20060,7 @@
                           <a:headEnd type="none" w="med" len="med"/>
                           <a:tailEnd type="none" w="med" len="med"/>
                         </a:lnB>
-                        <a:solidFill>
-                          <a:srgbClr val="EEF4FB"/>
-                        </a:solidFill>
+                        <a:noFill/>
                       </a:tcPr>
                     </a:tc>
                     <a:tc>
@@ -19983,9 +20126,7 @@
                           <a:headEnd type="none" w="med" len="med"/>
                           <a:tailEnd type="none" w="med" len="med"/>
                         </a:lnB>
-                        <a:solidFill>
-                          <a:srgbClr val="EEF4FB"/>
-                        </a:solidFill>
+                        <a:noFill/>
                       </a:tcPr>
                     </a:tc>
                     <a:extLst>
@@ -21391,7 +21532,7 @@
             </a:graphic>
           </p:graphicFrame>
         </mc:Choice>
-        <mc:Fallback xmlns="">
+        <mc:Fallback>
           <p:graphicFrame>
             <p:nvGraphicFramePr>
               <p:cNvPr id="16" name="Table 0"/>
@@ -21401,7 +21542,7 @@
               <p:nvPr>
                 <p:extLst>
                   <p:ext uri="{D42A27DB-BD31-4B8C-83A1-F6EECF244321}">
-                    <p14:modId xmlns:p14="http://schemas.microsoft.com/office/powerpoint/2010/main" val="89543725"/>
+                    <p14:modId xmlns:p14="http://schemas.microsoft.com/office/powerpoint/2010/main" val="316345146"/>
                   </p:ext>
                 </p:extLst>
               </p:nvPr>
@@ -21937,9 +22078,7 @@
                           <a:headEnd type="none" w="med" len="med"/>
                           <a:tailEnd type="none" w="med" len="med"/>
                         </a:lnB>
-                        <a:solidFill>
-                          <a:srgbClr val="EEF4FB"/>
-                        </a:solidFill>
+                        <a:noFill/>
                       </a:tcPr>
                     </a:tc>
                     <a:tc>
@@ -22005,9 +22144,7 @@
                           <a:headEnd type="none" w="med" len="med"/>
                           <a:tailEnd type="none" w="med" len="med"/>
                         </a:lnB>
-                        <a:solidFill>
-                          <a:srgbClr val="EEF4FB"/>
-                        </a:solidFill>
+                        <a:noFill/>
                       </a:tcPr>
                     </a:tc>
                     <a:tc>
@@ -22073,9 +22210,7 @@
                           <a:headEnd type="none" w="med" len="med"/>
                           <a:tailEnd type="none" w="med" len="med"/>
                         </a:lnB>
-                        <a:solidFill>
-                          <a:srgbClr val="EEF4FB"/>
-                        </a:solidFill>
+                        <a:noFill/>
                       </a:tcPr>
                     </a:tc>
                     <a:tc>
@@ -22247,9 +22382,7 @@
                           <a:headEnd type="none" w="med" len="med"/>
                           <a:tailEnd type="none" w="med" len="med"/>
                         </a:lnB>
-                        <a:solidFill>
-                          <a:srgbClr val="EEF4FB"/>
-                        </a:solidFill>
+                        <a:noFill/>
                       </a:tcPr>
                     </a:tc>
                     <a:extLst>
@@ -26804,7 +26937,7 @@
             <a:avLst/>
           </a:prstGeom>
           <a:solidFill>
-            <a:srgbClr val="F5F7FA"/>
+            <a:srgbClr val="D6E4F0"/>
           </a:solidFill>
           <a:ln w="12700">
             <a:solidFill>
@@ -26937,7 +27070,7 @@
             <a:avLst/>
           </a:prstGeom>
           <a:solidFill>
-            <a:srgbClr val="F5F7FA"/>
+            <a:srgbClr val="D6E4F0"/>
           </a:solidFill>
           <a:ln w="12700">
             <a:solidFill>
@@ -27517,7 +27650,7 @@
             <a:avLst/>
           </a:prstGeom>
           <a:solidFill>
-            <a:srgbClr val="F5F7FA"/>
+            <a:srgbClr val="D6E4F0"/>
           </a:solidFill>
           <a:ln w="12700">
             <a:solidFill>
@@ -27727,7 +27860,7 @@
             <a:avLst/>
           </a:prstGeom>
           <a:solidFill>
-            <a:srgbClr val="F5F7FA"/>
+            <a:srgbClr val="D6E4F0"/>
           </a:solidFill>
           <a:ln w="12700">
             <a:solidFill>

--- a/paolo.spallanzani.pptx
+++ b/paolo.spallanzani.pptx
@@ -6,7 +6,7 @@
     <p:sldMasterId id="2147483655" r:id="rId2"/>
   </p:sldMasterIdLst>
   <p:notesMasterIdLst>
-    <p:notesMasterId r:id="rId25"/>
+    <p:notesMasterId r:id="rId26"/>
   </p:notesMasterIdLst>
   <p:sldIdLst>
     <p:sldId id="266" r:id="rId3"/>
@@ -23,14 +23,15 @@
     <p:sldId id="285" r:id="rId14"/>
     <p:sldId id="293" r:id="rId15"/>
     <p:sldId id="303" r:id="rId16"/>
-    <p:sldId id="297" r:id="rId17"/>
-    <p:sldId id="268" r:id="rId18"/>
-    <p:sldId id="295" r:id="rId19"/>
-    <p:sldId id="296" r:id="rId20"/>
-    <p:sldId id="302" r:id="rId21"/>
-    <p:sldId id="270" r:id="rId22"/>
-    <p:sldId id="299" r:id="rId23"/>
-    <p:sldId id="300" r:id="rId24"/>
+    <p:sldId id="304" r:id="rId17"/>
+    <p:sldId id="297" r:id="rId18"/>
+    <p:sldId id="268" r:id="rId19"/>
+    <p:sldId id="295" r:id="rId20"/>
+    <p:sldId id="296" r:id="rId21"/>
+    <p:sldId id="302" r:id="rId22"/>
+    <p:sldId id="270" r:id="rId23"/>
+    <p:sldId id="299" r:id="rId24"/>
+    <p:sldId id="300" r:id="rId25"/>
   </p:sldIdLst>
   <p:sldSz cx="9144000" cy="5143500" type="screen16x9"/>
   <p:notesSz cx="5143500" cy="9144000"/>
@@ -435,6 +436,90 @@
   <p:cSld>
     <p:spTree>
       <p:nvGrpSpPr>
+        <p:cNvPr id="1" name=""/>
+        <p:cNvGrpSpPr/>
+        <p:nvPr/>
+      </p:nvGrpSpPr>
+      <p:grpSpPr>
+        <a:xfrm>
+          <a:off x="0" y="0"/>
+          <a:ext cx="0" cy="0"/>
+          <a:chOff x="0" y="0"/>
+          <a:chExt cx="0" cy="0"/>
+        </a:xfrm>
+      </p:grpSpPr>
+      <p:sp>
+        <p:nvSpPr>
+          <p:cNvPr id="2" name="Slide Image Placeholder 1"/>
+          <p:cNvSpPr>
+            <a:spLocks noGrp="1" noRot="1" noChangeAspect="1"/>
+          </p:cNvSpPr>
+          <p:nvPr>
+            <p:ph type="sldImg"/>
+          </p:nvPr>
+        </p:nvSpPr>
+        <p:spPr/>
+      </p:sp>
+      <p:sp>
+        <p:nvSpPr>
+          <p:cNvPr id="3" name="Notes Placeholder 2"/>
+          <p:cNvSpPr>
+            <a:spLocks noGrp="1"/>
+          </p:cNvSpPr>
+          <p:nvPr>
+            <p:ph type="body" idx="1"/>
+          </p:nvPr>
+        </p:nvSpPr>
+        <p:spPr/>
+        <p:txBody>
+          <a:bodyPr/>
+          <a:lstStyle/>
+          <a:p>
+            <a:endParaRPr lang="en-US" dirty="0"/>
+          </a:p>
+        </p:txBody>
+      </p:sp>
+      <p:sp>
+        <p:nvSpPr>
+          <p:cNvPr id="4" name="Slide Number Placeholder 3"/>
+          <p:cNvSpPr>
+            <a:spLocks noGrp="1"/>
+          </p:cNvSpPr>
+          <p:nvPr>
+            <p:ph type="sldNum" sz="quarter" idx="10"/>
+          </p:nvPr>
+        </p:nvSpPr>
+        <p:spPr/>
+        <p:txBody>
+          <a:bodyPr/>
+          <a:lstStyle/>
+          <a:p>
+            <a:fld id="{F7021451-1387-4CA6-816F-3879F97B5CBC}" type="slidenum">
+              <a:rPr lang="en-US"/>
+              <a:t>18</a:t>
+            </a:fld>
+            <a:endParaRPr lang="en-US"/>
+          </a:p>
+        </p:txBody>
+      </p:sp>
+    </p:spTree>
+    <p:extLst>
+      <p:ext uri="{BB962C8B-B14F-4D97-AF65-F5344CB8AC3E}">
+        <p14:creationId xmlns:p14="http://schemas.microsoft.com/office/powerpoint/2010/main" val="1024086991"/>
+      </p:ext>
+    </p:extLst>
+  </p:cSld>
+  <p:clrMapOvr>
+    <a:masterClrMapping/>
+  </p:clrMapOvr>
+</p:notes>
+</file>
+
+<file path=ppt/notesSlides/notesSlide12.xml><?xml version="1.0" encoding="utf-8"?>
+<p:notes xmlns:a="http://schemas.openxmlformats.org/drawingml/2006/main" xmlns:r="http://schemas.openxmlformats.org/officeDocument/2006/relationships" xmlns:p="http://schemas.openxmlformats.org/presentationml/2006/main">
+  <p:cSld>
+    <p:spTree>
+      <p:nvGrpSpPr>
         <p:cNvPr id="1" name="">
           <a:extLst>
             <a:ext uri="{FF2B5EF4-FFF2-40B4-BE49-F238E27FC236}">
@@ -519,7 +604,7 @@
           <a:p>
             <a:fld id="{F7021451-1387-4CA6-816F-3879F97B5CBC}" type="slidenum">
               <a:rPr lang="en-US"/>
-              <a:t>18</a:t>
+              <a:t>19</a:t>
             </a:fld>
             <a:endParaRPr lang="en-US"/>
           </a:p>
@@ -538,7 +623,7 @@
 </p:notes>
 </file>
 
-<file path=ppt/notesSlides/notesSlide12.xml><?xml version="1.0" encoding="utf-8"?>
+<file path=ppt/notesSlides/notesSlide13.xml><?xml version="1.0" encoding="utf-8"?>
 <p:notes xmlns:a="http://schemas.openxmlformats.org/drawingml/2006/main" xmlns:r="http://schemas.openxmlformats.org/officeDocument/2006/relationships" xmlns:p="http://schemas.openxmlformats.org/presentationml/2006/main">
   <p:cSld>
     <p:spTree>
@@ -627,7 +712,7 @@
           <a:p>
             <a:fld id="{F7021451-1387-4CA6-816F-3879F97B5CBC}" type="slidenum">
               <a:rPr lang="en-US"/>
-              <a:t>19</a:t>
+              <a:t>20</a:t>
             </a:fld>
             <a:endParaRPr lang="en-US"/>
           </a:p>
@@ -637,90 +722,6 @@
     <p:extLst>
       <p:ext uri="{BB962C8B-B14F-4D97-AF65-F5344CB8AC3E}">
         <p14:creationId xmlns:p14="http://schemas.microsoft.com/office/powerpoint/2010/main" val="1908227901"/>
-      </p:ext>
-    </p:extLst>
-  </p:cSld>
-  <p:clrMapOvr>
-    <a:masterClrMapping/>
-  </p:clrMapOvr>
-</p:notes>
-</file>
-
-<file path=ppt/notesSlides/notesSlide13.xml><?xml version="1.0" encoding="utf-8"?>
-<p:notes xmlns:a="http://schemas.openxmlformats.org/drawingml/2006/main" xmlns:r="http://schemas.openxmlformats.org/officeDocument/2006/relationships" xmlns:p="http://schemas.openxmlformats.org/presentationml/2006/main">
-  <p:cSld>
-    <p:spTree>
-      <p:nvGrpSpPr>
-        <p:cNvPr id="1" name=""/>
-        <p:cNvGrpSpPr/>
-        <p:nvPr/>
-      </p:nvGrpSpPr>
-      <p:grpSpPr>
-        <a:xfrm>
-          <a:off x="0" y="0"/>
-          <a:ext cx="0" cy="0"/>
-          <a:chOff x="0" y="0"/>
-          <a:chExt cx="0" cy="0"/>
-        </a:xfrm>
-      </p:grpSpPr>
-      <p:sp>
-        <p:nvSpPr>
-          <p:cNvPr id="2" name="Slide Image Placeholder 1"/>
-          <p:cNvSpPr>
-            <a:spLocks noGrp="1" noRot="1" noChangeAspect="1"/>
-          </p:cNvSpPr>
-          <p:nvPr>
-            <p:ph type="sldImg"/>
-          </p:nvPr>
-        </p:nvSpPr>
-        <p:spPr/>
-      </p:sp>
-      <p:sp>
-        <p:nvSpPr>
-          <p:cNvPr id="3" name="Notes Placeholder 2"/>
-          <p:cNvSpPr>
-            <a:spLocks noGrp="1"/>
-          </p:cNvSpPr>
-          <p:nvPr>
-            <p:ph type="body" idx="1"/>
-          </p:nvPr>
-        </p:nvSpPr>
-        <p:spPr/>
-        <p:txBody>
-          <a:bodyPr/>
-          <a:lstStyle/>
-          <a:p>
-            <a:endParaRPr lang="en-US" dirty="0"/>
-          </a:p>
-        </p:txBody>
-      </p:sp>
-      <p:sp>
-        <p:nvSpPr>
-          <p:cNvPr id="4" name="Slide Number Placeholder 3"/>
-          <p:cNvSpPr>
-            <a:spLocks noGrp="1"/>
-          </p:cNvSpPr>
-          <p:nvPr>
-            <p:ph type="sldNum" sz="quarter" idx="10"/>
-          </p:nvPr>
-        </p:nvSpPr>
-        <p:spPr/>
-        <p:txBody>
-          <a:bodyPr/>
-          <a:lstStyle/>
-          <a:p>
-            <a:fld id="{F7021451-1387-4CA6-816F-3879F97B5CBC}" type="slidenum">
-              <a:rPr lang="en-US"/>
-              <a:t>20</a:t>
-            </a:fld>
-            <a:endParaRPr lang="en-US"/>
-          </a:p>
-        </p:txBody>
-      </p:sp>
-    </p:spTree>
-    <p:extLst>
-      <p:ext uri="{BB962C8B-B14F-4D97-AF65-F5344CB8AC3E}">
-        <p14:creationId xmlns:p14="http://schemas.microsoft.com/office/powerpoint/2010/main" val="1024086991"/>
       </p:ext>
     </p:extLst>
   </p:cSld>
@@ -796,6 +797,90 @@
             <a:fld id="{F7021451-1387-4CA6-816F-3879F97B5CBC}" type="slidenum">
               <a:rPr lang="en-US"/>
               <a:t>21</a:t>
+            </a:fld>
+            <a:endParaRPr lang="en-US"/>
+          </a:p>
+        </p:txBody>
+      </p:sp>
+    </p:spTree>
+    <p:extLst>
+      <p:ext uri="{BB962C8B-B14F-4D97-AF65-F5344CB8AC3E}">
+        <p14:creationId xmlns:p14="http://schemas.microsoft.com/office/powerpoint/2010/main" val="1024086991"/>
+      </p:ext>
+    </p:extLst>
+  </p:cSld>
+  <p:clrMapOvr>
+    <a:masterClrMapping/>
+  </p:clrMapOvr>
+</p:notes>
+</file>
+
+<file path=ppt/notesSlides/notesSlide15.xml><?xml version="1.0" encoding="utf-8"?>
+<p:notes xmlns:a="http://schemas.openxmlformats.org/drawingml/2006/main" xmlns:r="http://schemas.openxmlformats.org/officeDocument/2006/relationships" xmlns:p="http://schemas.openxmlformats.org/presentationml/2006/main">
+  <p:cSld>
+    <p:spTree>
+      <p:nvGrpSpPr>
+        <p:cNvPr id="1" name=""/>
+        <p:cNvGrpSpPr/>
+        <p:nvPr/>
+      </p:nvGrpSpPr>
+      <p:grpSpPr>
+        <a:xfrm>
+          <a:off x="0" y="0"/>
+          <a:ext cx="0" cy="0"/>
+          <a:chOff x="0" y="0"/>
+          <a:chExt cx="0" cy="0"/>
+        </a:xfrm>
+      </p:grpSpPr>
+      <p:sp>
+        <p:nvSpPr>
+          <p:cNvPr id="2" name="Slide Image Placeholder 1"/>
+          <p:cNvSpPr>
+            <a:spLocks noGrp="1" noRot="1" noChangeAspect="1"/>
+          </p:cNvSpPr>
+          <p:nvPr>
+            <p:ph type="sldImg"/>
+          </p:nvPr>
+        </p:nvSpPr>
+        <p:spPr/>
+      </p:sp>
+      <p:sp>
+        <p:nvSpPr>
+          <p:cNvPr id="3" name="Notes Placeholder 2"/>
+          <p:cNvSpPr>
+            <a:spLocks noGrp="1"/>
+          </p:cNvSpPr>
+          <p:nvPr>
+            <p:ph type="body" idx="1"/>
+          </p:nvPr>
+        </p:nvSpPr>
+        <p:spPr/>
+        <p:txBody>
+          <a:bodyPr/>
+          <a:lstStyle/>
+          <a:p>
+            <a:endParaRPr lang="en-US" dirty="0"/>
+          </a:p>
+        </p:txBody>
+      </p:sp>
+      <p:sp>
+        <p:nvSpPr>
+          <p:cNvPr id="4" name="Slide Number Placeholder 3"/>
+          <p:cNvSpPr>
+            <a:spLocks noGrp="1"/>
+          </p:cNvSpPr>
+          <p:nvPr>
+            <p:ph type="sldNum" sz="quarter" idx="10"/>
+          </p:nvPr>
+        </p:nvSpPr>
+        <p:spPr/>
+        <p:txBody>
+          <a:bodyPr/>
+          <a:lstStyle/>
+          <a:p>
+            <a:fld id="{F7021451-1387-4CA6-816F-3879F97B5CBC}" type="slidenum">
+              <a:rPr lang="en-US"/>
+              <a:t>22</a:t>
             </a:fld>
             <a:endParaRPr lang="en-US"/>
           </a:p>
@@ -1347,7 +1432,13 @@
   <p:cSld>
     <p:spTree>
       <p:nvGrpSpPr>
-        <p:cNvPr id="1" name=""/>
+        <p:cNvPr id="1" name="">
+          <a:extLst>
+            <a:ext uri="{FF2B5EF4-FFF2-40B4-BE49-F238E27FC236}">
+              <a16:creationId xmlns:a16="http://schemas.microsoft.com/office/drawing/2014/main" id="{B8BC6327-4250-763E-A628-052B56C64FC8}"/>
+            </a:ext>
+          </a:extLst>
+        </p:cNvPr>
         <p:cNvGrpSpPr/>
         <p:nvPr/>
       </p:nvGrpSpPr>
@@ -1361,7 +1452,13 @@
       </p:grpSpPr>
       <p:sp>
         <p:nvSpPr>
-          <p:cNvPr id="2" name="Slide Image Placeholder 1"/>
+          <p:cNvPr id="2" name="Slide Image Placeholder 1">
+            <a:extLst>
+              <a:ext uri="{FF2B5EF4-FFF2-40B4-BE49-F238E27FC236}">
+                <a16:creationId xmlns:a16="http://schemas.microsoft.com/office/drawing/2014/main" id="{26C3F0A8-1A49-06BF-930E-3595AE8457A4}"/>
+              </a:ext>
+            </a:extLst>
+          </p:cNvPr>
           <p:cNvSpPr>
             <a:spLocks noGrp="1" noRot="1" noChangeAspect="1"/>
           </p:cNvSpPr>
@@ -1373,7 +1470,13 @@
       </p:sp>
       <p:sp>
         <p:nvSpPr>
-          <p:cNvPr id="3" name="Notes Placeholder 2"/>
+          <p:cNvPr id="3" name="Notes Placeholder 2">
+            <a:extLst>
+              <a:ext uri="{FF2B5EF4-FFF2-40B4-BE49-F238E27FC236}">
+                <a16:creationId xmlns:a16="http://schemas.microsoft.com/office/drawing/2014/main" id="{028647C6-46FA-9B42-0CB0-22297E908666}"/>
+              </a:ext>
+            </a:extLst>
+          </p:cNvPr>
           <p:cNvSpPr>
             <a:spLocks noGrp="1"/>
           </p:cNvSpPr>
@@ -1392,7 +1495,13 @@
       </p:sp>
       <p:sp>
         <p:nvSpPr>
-          <p:cNvPr id="4" name="Slide Number Placeholder 3"/>
+          <p:cNvPr id="4" name="Slide Number Placeholder 3">
+            <a:extLst>
+              <a:ext uri="{FF2B5EF4-FFF2-40B4-BE49-F238E27FC236}">
+                <a16:creationId xmlns:a16="http://schemas.microsoft.com/office/drawing/2014/main" id="{708EA118-BE47-C85B-9F65-71D06BDCFB90}"/>
+              </a:ext>
+            </a:extLst>
+          </p:cNvPr>
           <p:cNvSpPr>
             <a:spLocks noGrp="1"/>
           </p:cNvSpPr>
@@ -1416,7 +1525,7 @@
     </p:spTree>
     <p:extLst>
       <p:ext uri="{BB962C8B-B14F-4D97-AF65-F5344CB8AC3E}">
-        <p14:creationId xmlns:p14="http://schemas.microsoft.com/office/powerpoint/2010/main" val="1024086991"/>
+        <p14:creationId xmlns:p14="http://schemas.microsoft.com/office/powerpoint/2010/main" val="843097784"/>
       </p:ext>
     </p:extLst>
   </p:cSld>
@@ -11485,6 +11594,181 @@
   <p:cSld>
     <p:spTree>
       <p:nvGrpSpPr>
+        <p:cNvPr id="1" name="">
+          <a:extLst>
+            <a:ext uri="{FF2B5EF4-FFF2-40B4-BE49-F238E27FC236}">
+              <a16:creationId xmlns:a16="http://schemas.microsoft.com/office/drawing/2014/main" id="{9D4D965E-F7FD-4F40-27A9-07CD11B8F07A}"/>
+            </a:ext>
+          </a:extLst>
+        </p:cNvPr>
+        <p:cNvGrpSpPr/>
+        <p:nvPr/>
+      </p:nvGrpSpPr>
+      <p:grpSpPr>
+        <a:xfrm>
+          <a:off x="0" y="0"/>
+          <a:ext cx="0" cy="0"/>
+          <a:chOff x="0" y="0"/>
+          <a:chExt cx="0" cy="0"/>
+        </a:xfrm>
+      </p:grpSpPr>
+      <p:sp>
+        <p:nvSpPr>
+          <p:cNvPr id="4" name="Shape 2">
+            <a:extLst>
+              <a:ext uri="{FF2B5EF4-FFF2-40B4-BE49-F238E27FC236}">
+                <a16:creationId xmlns:a16="http://schemas.microsoft.com/office/drawing/2014/main" id="{7B1632B3-2CA7-DFEE-1BE3-AA0F1A03D650}"/>
+              </a:ext>
+            </a:extLst>
+          </p:cNvPr>
+          <p:cNvSpPr/>
+          <p:nvPr/>
+        </p:nvSpPr>
+        <p:spPr>
+          <a:xfrm>
+            <a:off x="320040" y="237744"/>
+            <a:ext cx="64008" cy="457200"/>
+          </a:xfrm>
+          <a:prstGeom prst="rect">
+            <a:avLst/>
+          </a:prstGeom>
+          <a:solidFill>
+            <a:srgbClr val="C8472C"/>
+          </a:solidFill>
+          <a:ln w="12700">
+            <a:solidFill>
+              <a:srgbClr val="C8472C"/>
+            </a:solidFill>
+            <a:prstDash val="solid"/>
+          </a:ln>
+        </p:spPr>
+      </p:sp>
+      <p:sp>
+        <p:nvSpPr>
+          <p:cNvPr id="5" name="Text 3">
+            <a:extLst>
+              <a:ext uri="{FF2B5EF4-FFF2-40B4-BE49-F238E27FC236}">
+                <a16:creationId xmlns:a16="http://schemas.microsoft.com/office/drawing/2014/main" id="{8B23E728-F0EE-D292-C168-2BFB239B251A}"/>
+              </a:ext>
+            </a:extLst>
+          </p:cNvPr>
+          <p:cNvSpPr/>
+          <p:nvPr/>
+        </p:nvSpPr>
+        <p:spPr>
+          <a:xfrm>
+            <a:off x="502920" y="256032"/>
+            <a:ext cx="8229600" cy="457200"/>
+          </a:xfrm>
+          <a:prstGeom prst="rect">
+            <a:avLst/>
+          </a:prstGeom>
+          <a:noFill/>
+          <a:ln/>
+        </p:spPr>
+        <p:txBody>
+          <a:bodyPr wrap="square" lIns="0" tIns="0" rIns="0" bIns="0" rtlCol="0" anchor="ctr"/>
+          <a:lstStyle/>
+          <a:p>
+            <a:pPr marL="0" indent="0" algn="l">
+              <a:buNone/>
+            </a:pPr>
+            <a:r>
+              <a:rPr lang="en-US" sz="2600" b="1" dirty="0">
+                <a:solidFill>
+                  <a:srgbClr val="1A1A1A"/>
+                </a:solidFill>
+                <a:latin typeface="Calibri" pitchFamily="34" charset="0"/>
+                <a:ea typeface="Calibri" pitchFamily="34" charset="-122"/>
+                <a:cs typeface="Calibri" pitchFamily="34" charset="-120"/>
+              </a:rPr>
+              <a:t>Results – Failed Attempts </a:t>
+            </a:r>
+            <a:endParaRPr lang="en-US" sz="2600" dirty="0"/>
+          </a:p>
+        </p:txBody>
+      </p:sp>
+      <p:sp>
+        <p:nvSpPr>
+          <p:cNvPr id="6" name="Shape 4">
+            <a:extLst>
+              <a:ext uri="{FF2B5EF4-FFF2-40B4-BE49-F238E27FC236}">
+                <a16:creationId xmlns:a16="http://schemas.microsoft.com/office/drawing/2014/main" id="{12DE7661-1140-6836-742F-A531A83E37DB}"/>
+              </a:ext>
+            </a:extLst>
+          </p:cNvPr>
+          <p:cNvSpPr/>
+          <p:nvPr/>
+        </p:nvSpPr>
+        <p:spPr>
+          <a:xfrm>
+            <a:off x="320040" y="777240"/>
+            <a:ext cx="8503920" cy="0"/>
+          </a:xfrm>
+          <a:prstGeom prst="line">
+            <a:avLst/>
+          </a:prstGeom>
+          <a:noFill/>
+          <a:ln w="19050">
+            <a:solidFill>
+              <a:srgbClr val="D6E4F0"/>
+            </a:solidFill>
+            <a:prstDash val="solid"/>
+          </a:ln>
+        </p:spPr>
+      </p:sp>
+      <p:sp>
+        <p:nvSpPr>
+          <p:cNvPr id="8" name="Text 6">
+            <a:extLst>
+              <a:ext uri="{FF2B5EF4-FFF2-40B4-BE49-F238E27FC236}">
+                <a16:creationId xmlns:a16="http://schemas.microsoft.com/office/drawing/2014/main" id="{8FEE4770-3A96-546F-2102-4220F96D5FE4}"/>
+              </a:ext>
+            </a:extLst>
+          </p:cNvPr>
+          <p:cNvSpPr/>
+          <p:nvPr/>
+        </p:nvSpPr>
+        <p:spPr>
+          <a:xfrm>
+            <a:off x="457200" y="939547"/>
+            <a:ext cx="8229600" cy="411480"/>
+          </a:xfrm>
+          <a:prstGeom prst="rect">
+            <a:avLst/>
+          </a:prstGeom>
+          <a:noFill/>
+          <a:ln/>
+        </p:spPr>
+        <p:txBody>
+          <a:bodyPr wrap="square" rtlCol="0" anchor="ctr"/>
+          <a:lstStyle/>
+          <a:p>
+            <a:r>
+              <a:rPr lang="en-US" sz="1600" i="1" dirty="0"/>
+              <a:t>Examples of not meaningful policy learning</a:t>
+            </a:r>
+          </a:p>
+        </p:txBody>
+      </p:sp>
+    </p:spTree>
+    <p:extLst>
+      <p:ext uri="{BB962C8B-B14F-4D97-AF65-F5344CB8AC3E}">
+        <p14:creationId xmlns:p14="http://schemas.microsoft.com/office/powerpoint/2010/main" val="1602642932"/>
+      </p:ext>
+    </p:extLst>
+  </p:cSld>
+  <p:clrMapOvr>
+    <a:masterClrMapping/>
+  </p:clrMapOvr>
+</p:sld>
+</file>
+
+<file path=ppt/slides/slide16.xml><?xml version="1.0" encoding="utf-8"?>
+<p:sld xmlns:a="http://schemas.openxmlformats.org/drawingml/2006/main" xmlns:r="http://schemas.openxmlformats.org/officeDocument/2006/relationships" xmlns:p="http://schemas.openxmlformats.org/presentationml/2006/main">
+  <p:cSld>
+    <p:spTree>
+      <p:nvGrpSpPr>
         <p:cNvPr id="1" name=""/>
         <p:cNvGrpSpPr/>
         <p:nvPr/>
@@ -13233,7 +13517,7 @@
 </p:sld>
 </file>
 
-<file path=ppt/slides/slide16.xml><?xml version="1.0" encoding="utf-8"?>
+<file path=ppt/slides/slide17.xml><?xml version="1.0" encoding="utf-8"?>
 <p:sld xmlns:a="http://schemas.openxmlformats.org/drawingml/2006/main" xmlns:r="http://schemas.openxmlformats.org/officeDocument/2006/relationships" xmlns:p="http://schemas.openxmlformats.org/presentationml/2006/main">
   <p:cSld>
     <p:spTree>
@@ -14064,7 +14348,7 @@
 </p:sld>
 </file>
 
-<file path=ppt/slides/slide17.xml><?xml version="1.0" encoding="utf-8"?>
+<file path=ppt/slides/slide18.xml><?xml version="1.0" encoding="utf-8"?>
 <p:sld xmlns:a="http://schemas.openxmlformats.org/drawingml/2006/main" xmlns:r="http://schemas.openxmlformats.org/officeDocument/2006/relationships" xmlns:p="http://schemas.openxmlformats.org/presentationml/2006/main">
   <p:cSld>
     <p:spTree>
@@ -15993,7 +16277,7 @@
 </p:sld>
 </file>
 
-<file path=ppt/slides/slide18.xml><?xml version="1.0" encoding="utf-8"?>
+<file path=ppt/slides/slide19.xml><?xml version="1.0" encoding="utf-8"?>
 <p:sld xmlns:a="http://schemas.openxmlformats.org/drawingml/2006/main" xmlns:r="http://schemas.openxmlformats.org/officeDocument/2006/relationships" xmlns:p="http://schemas.openxmlformats.org/presentationml/2006/main">
   <p:cSld>
     <p:spTree>
@@ -18081,7 +18365,393 @@
 </p:sld>
 </file>
 
-<file path=ppt/slides/slide19.xml><?xml version="1.0" encoding="utf-8"?>
+<file path=ppt/slides/slide2.xml><?xml version="1.0" encoding="utf-8"?>
+<p:sld xmlns:a="http://schemas.openxmlformats.org/drawingml/2006/main" xmlns:r="http://schemas.openxmlformats.org/officeDocument/2006/relationships" xmlns:p="http://schemas.openxmlformats.org/presentationml/2006/main">
+  <p:cSld>
+    <p:spTree>
+      <p:nvGrpSpPr>
+        <p:cNvPr id="1" name=""/>
+        <p:cNvGrpSpPr/>
+        <p:nvPr/>
+      </p:nvGrpSpPr>
+      <p:grpSpPr>
+        <a:xfrm>
+          <a:off x="0" y="0"/>
+          <a:ext cx="0" cy="0"/>
+          <a:chOff x="0" y="0"/>
+          <a:chExt cx="0" cy="0"/>
+        </a:xfrm>
+      </p:grpSpPr>
+      <p:sp>
+        <p:nvSpPr>
+          <p:cNvPr id="4" name="Shape 2"/>
+          <p:cNvSpPr/>
+          <p:nvPr/>
+        </p:nvSpPr>
+        <p:spPr>
+          <a:xfrm>
+            <a:off x="320040" y="237744"/>
+            <a:ext cx="64008" cy="457200"/>
+          </a:xfrm>
+          <a:prstGeom prst="rect">
+            <a:avLst/>
+          </a:prstGeom>
+          <a:solidFill>
+            <a:srgbClr val="C8472C"/>
+          </a:solidFill>
+          <a:ln w="12700">
+            <a:solidFill>
+              <a:srgbClr val="C8472C"/>
+            </a:solidFill>
+            <a:prstDash val="solid"/>
+          </a:ln>
+        </p:spPr>
+      </p:sp>
+      <p:sp>
+        <p:nvSpPr>
+          <p:cNvPr id="5" name="Text 3"/>
+          <p:cNvSpPr/>
+          <p:nvPr/>
+        </p:nvSpPr>
+        <p:spPr>
+          <a:xfrm>
+            <a:off x="502920" y="256032"/>
+            <a:ext cx="8229600" cy="457200"/>
+          </a:xfrm>
+          <a:prstGeom prst="rect">
+            <a:avLst/>
+          </a:prstGeom>
+          <a:noFill/>
+          <a:ln/>
+        </p:spPr>
+        <p:txBody>
+          <a:bodyPr wrap="square" lIns="0" tIns="0" rIns="0" bIns="0" rtlCol="0" anchor="ctr"/>
+          <a:lstStyle/>
+          <a:p>
+            <a:pPr marL="0" indent="0" algn="l">
+              <a:buNone/>
+            </a:pPr>
+            <a:r>
+              <a:rPr lang="en-US" sz="2600" b="1" dirty="0">
+                <a:solidFill>
+                  <a:srgbClr val="1A1A1A"/>
+                </a:solidFill>
+                <a:latin typeface="Calibri" pitchFamily="34" charset="0"/>
+                <a:ea typeface="Calibri" pitchFamily="34" charset="-122"/>
+                <a:cs typeface="Calibri" pitchFamily="34" charset="-120"/>
+              </a:rPr>
+              <a:t>Motivation &amp; Scope</a:t>
+            </a:r>
+            <a:endParaRPr lang="en-US" sz="2600" dirty="0"/>
+          </a:p>
+        </p:txBody>
+      </p:sp>
+      <p:sp>
+        <p:nvSpPr>
+          <p:cNvPr id="6" name="Shape 4"/>
+          <p:cNvSpPr/>
+          <p:nvPr/>
+        </p:nvSpPr>
+        <p:spPr>
+          <a:xfrm>
+            <a:off x="320040" y="777240"/>
+            <a:ext cx="8503920" cy="0"/>
+          </a:xfrm>
+          <a:prstGeom prst="line">
+            <a:avLst/>
+          </a:prstGeom>
+          <a:noFill/>
+          <a:ln w="19050">
+            <a:solidFill>
+              <a:srgbClr val="D6E4F0"/>
+            </a:solidFill>
+            <a:prstDash val="solid"/>
+          </a:ln>
+        </p:spPr>
+      </p:sp>
+      <p:sp>
+        <p:nvSpPr>
+          <p:cNvPr id="7" name="Shape 5"/>
+          <p:cNvSpPr/>
+          <p:nvPr/>
+        </p:nvSpPr>
+        <p:spPr>
+          <a:xfrm>
+            <a:off x="725123" y="953265"/>
+            <a:ext cx="7785194" cy="960120"/>
+          </a:xfrm>
+          <a:prstGeom prst="rect">
+            <a:avLst/>
+          </a:prstGeom>
+          <a:solidFill>
+            <a:srgbClr val="D6E4F0"/>
+          </a:solidFill>
+          <a:ln w="12700">
+            <a:solidFill>
+              <a:srgbClr val="D6E4F0"/>
+            </a:solidFill>
+            <a:prstDash val="solid"/>
+          </a:ln>
+        </p:spPr>
+      </p:sp>
+      <p:sp>
+        <p:nvSpPr>
+          <p:cNvPr id="8" name="Text 6"/>
+          <p:cNvSpPr/>
+          <p:nvPr/>
+        </p:nvSpPr>
+        <p:spPr>
+          <a:xfrm>
+            <a:off x="457200" y="988696"/>
+            <a:ext cx="8229600" cy="868680"/>
+          </a:xfrm>
+          <a:prstGeom prst="rect">
+            <a:avLst/>
+          </a:prstGeom>
+          <a:noFill/>
+          <a:ln/>
+        </p:spPr>
+        <p:txBody>
+          <a:bodyPr wrap="square" rtlCol="0" anchor="ctr"/>
+          <a:lstStyle/>
+          <a:p>
+            <a:pPr marL="0" indent="0" algn="ctr">
+              <a:buNone/>
+            </a:pPr>
+            <a:r>
+              <a:rPr lang="en-US" b="1" i="1" dirty="0">
+                <a:latin typeface="Calibri" pitchFamily="34" charset="0"/>
+                <a:ea typeface="Calibri" pitchFamily="34" charset="-122"/>
+                <a:cs typeface="Calibri" pitchFamily="34" charset="-120"/>
+              </a:rPr>
+              <a:t>Can Deep Reinforcement Learning (DRL) be effectively</a:t>
+            </a:r>
+          </a:p>
+          <a:p>
+            <a:pPr marL="0" indent="0" algn="ctr">
+              <a:buNone/>
+            </a:pPr>
+            <a:r>
+              <a:rPr lang="en-US" b="1" i="1" dirty="0">
+                <a:latin typeface="Calibri" pitchFamily="34" charset="0"/>
+                <a:ea typeface="Calibri" pitchFamily="34" charset="-122"/>
+                <a:cs typeface="Calibri" pitchFamily="34" charset="-120"/>
+              </a:rPr>
+              <a:t>leveraged for autonomous exploration?</a:t>
+            </a:r>
+            <a:endParaRPr lang="en-US" b="1" dirty="0"/>
+          </a:p>
+        </p:txBody>
+      </p:sp>
+      <p:sp>
+        <p:nvSpPr>
+          <p:cNvPr id="9" name="Text 7"/>
+          <p:cNvSpPr/>
+          <p:nvPr/>
+        </p:nvSpPr>
+        <p:spPr>
+          <a:xfrm>
+            <a:off x="756524" y="2097409"/>
+            <a:ext cx="7615951" cy="1078041"/>
+          </a:xfrm>
+          <a:prstGeom prst="rect">
+            <a:avLst/>
+          </a:prstGeom>
+          <a:noFill/>
+          <a:ln/>
+        </p:spPr>
+        <p:txBody>
+          <a:bodyPr wrap="square" rtlCol="0" anchor="t"/>
+          <a:lstStyle/>
+          <a:p>
+            <a:pPr marL="190500" indent="-190500">
+              <a:spcAft>
+                <a:spcPts val="500"/>
+              </a:spcAft>
+              <a:buSzPct val="100000"/>
+              <a:buChar char="•"/>
+            </a:pPr>
+            <a:r>
+              <a:rPr lang="en-US" sz="1600" dirty="0">
+                <a:solidFill>
+                  <a:srgbClr val="1A1A1A"/>
+                </a:solidFill>
+                <a:latin typeface="Calibri" pitchFamily="34" charset="0"/>
+                <a:ea typeface="Calibri" pitchFamily="34" charset="-122"/>
+                <a:cs typeface="Calibri" pitchFamily="34" charset="-120"/>
+              </a:rPr>
+              <a:t>Autonomous exploration is a complex task</a:t>
+            </a:r>
+            <a:endParaRPr lang="en-US" sz="1600" dirty="0"/>
+          </a:p>
+          <a:p>
+            <a:pPr marL="190500" indent="-190500">
+              <a:spcAft>
+                <a:spcPts val="500"/>
+              </a:spcAft>
+              <a:buSzPct val="100000"/>
+              <a:buChar char="•"/>
+            </a:pPr>
+            <a:r>
+              <a:rPr lang="en-US" sz="1600" dirty="0">
+                <a:solidFill>
+                  <a:srgbClr val="1A1A1A"/>
+                </a:solidFill>
+                <a:latin typeface="Calibri" pitchFamily="34" charset="0"/>
+                <a:ea typeface="Calibri" pitchFamily="34" charset="-122"/>
+                <a:cs typeface="Calibri" pitchFamily="34" charset="-120"/>
+              </a:rPr>
+              <a:t>Classical analytical methods exist but present some limitations</a:t>
+            </a:r>
+            <a:endParaRPr lang="en-US" sz="1600" dirty="0"/>
+          </a:p>
+          <a:p>
+            <a:pPr marL="190500" indent="-190500">
+              <a:spcAft>
+                <a:spcPts val="500"/>
+              </a:spcAft>
+              <a:buSzPct val="100000"/>
+              <a:buChar char="•"/>
+            </a:pPr>
+            <a:r>
+              <a:rPr lang="en-US" sz="1600" dirty="0">
+                <a:solidFill>
+                  <a:srgbClr val="1A1A1A"/>
+                </a:solidFill>
+                <a:latin typeface="Calibri" pitchFamily="34" charset="0"/>
+                <a:ea typeface="Calibri" pitchFamily="34" charset="-122"/>
+                <a:cs typeface="Calibri" pitchFamily="34" charset="-120"/>
+              </a:rPr>
+              <a:t>Learning-based methods can provide more adaptive models</a:t>
+            </a:r>
+            <a:endParaRPr lang="en-US" sz="1600" dirty="0"/>
+          </a:p>
+        </p:txBody>
+      </p:sp>
+      <p:sp>
+        <p:nvSpPr>
+          <p:cNvPr id="11" name="Shape 5">
+            <a:extLst>
+              <a:ext uri="{FF2B5EF4-FFF2-40B4-BE49-F238E27FC236}">
+                <a16:creationId xmlns:a16="http://schemas.microsoft.com/office/drawing/2014/main" id="{000FCEB4-5A5B-AECB-8434-1AA1350D5054}"/>
+              </a:ext>
+            </a:extLst>
+          </p:cNvPr>
+          <p:cNvSpPr/>
+          <p:nvPr/>
+        </p:nvSpPr>
+        <p:spPr>
+          <a:xfrm>
+            <a:off x="673400" y="3324499"/>
+            <a:ext cx="7827505" cy="1140342"/>
+          </a:xfrm>
+          <a:prstGeom prst="rect">
+            <a:avLst/>
+          </a:prstGeom>
+          <a:solidFill>
+            <a:srgbClr val="D6E4F0"/>
+          </a:solidFill>
+          <a:ln w="12700">
+            <a:solidFill>
+              <a:srgbClr val="D6E4F0"/>
+            </a:solidFill>
+            <a:prstDash val="solid"/>
+          </a:ln>
+        </p:spPr>
+      </p:sp>
+      <p:sp>
+        <p:nvSpPr>
+          <p:cNvPr id="12" name="Text 6">
+            <a:extLst>
+              <a:ext uri="{FF2B5EF4-FFF2-40B4-BE49-F238E27FC236}">
+                <a16:creationId xmlns:a16="http://schemas.microsoft.com/office/drawing/2014/main" id="{0015EE5A-DA97-6AC7-337B-2E3B82A10631}"/>
+              </a:ext>
+            </a:extLst>
+          </p:cNvPr>
+          <p:cNvSpPr/>
+          <p:nvPr/>
+        </p:nvSpPr>
+        <p:spPr>
+          <a:xfrm>
+            <a:off x="1052824" y="3766303"/>
+            <a:ext cx="7023019" cy="472461"/>
+          </a:xfrm>
+          <a:prstGeom prst="rect">
+            <a:avLst/>
+          </a:prstGeom>
+          <a:noFill/>
+          <a:ln/>
+        </p:spPr>
+        <p:txBody>
+          <a:bodyPr wrap="square" rtlCol="0" anchor="ctr"/>
+          <a:lstStyle/>
+          <a:p>
+            <a:pPr marL="0" indent="0" algn="ctr">
+              <a:buNone/>
+            </a:pPr>
+            <a:r>
+              <a:rPr lang="en-US" dirty="0">
+                <a:latin typeface="Calibri" pitchFamily="34" charset="0"/>
+                <a:ea typeface="Calibri" pitchFamily="34" charset="-122"/>
+                <a:cs typeface="Calibri" pitchFamily="34" charset="-120"/>
+              </a:rPr>
+              <a:t>Develop a framework to investigate the possibility of integrating learning-based methods with classical ones</a:t>
+            </a:r>
+            <a:endParaRPr lang="en-US" dirty="0"/>
+          </a:p>
+        </p:txBody>
+      </p:sp>
+      <p:sp>
+        <p:nvSpPr>
+          <p:cNvPr id="14" name="Text 6">
+            <a:extLst>
+              <a:ext uri="{FF2B5EF4-FFF2-40B4-BE49-F238E27FC236}">
+                <a16:creationId xmlns:a16="http://schemas.microsoft.com/office/drawing/2014/main" id="{9E002ABA-51D8-44C0-5622-613A998D91FA}"/>
+              </a:ext>
+            </a:extLst>
+          </p:cNvPr>
+          <p:cNvSpPr/>
+          <p:nvPr/>
+        </p:nvSpPr>
+        <p:spPr>
+          <a:xfrm>
+            <a:off x="3909774" y="3293842"/>
+            <a:ext cx="1324451" cy="472461"/>
+          </a:xfrm>
+          <a:prstGeom prst="rect">
+            <a:avLst/>
+          </a:prstGeom>
+          <a:noFill/>
+          <a:ln/>
+        </p:spPr>
+        <p:txBody>
+          <a:bodyPr wrap="square" rtlCol="0" anchor="ctr"/>
+          <a:lstStyle/>
+          <a:p>
+            <a:pPr marL="0" indent="0" algn="ctr">
+              <a:buNone/>
+            </a:pPr>
+            <a:r>
+              <a:rPr lang="en-US" sz="2000" b="1" dirty="0">
+                <a:latin typeface="Calibri" pitchFamily="34" charset="0"/>
+                <a:ea typeface="Calibri" pitchFamily="34" charset="-122"/>
+                <a:cs typeface="Calibri" pitchFamily="34" charset="-120"/>
+              </a:rPr>
+              <a:t>Objective:</a:t>
+            </a:r>
+            <a:endParaRPr lang="en-US" sz="2000" dirty="0"/>
+          </a:p>
+        </p:txBody>
+      </p:sp>
+    </p:spTree>
+  </p:cSld>
+  <p:clrMapOvr>
+    <a:masterClrMapping/>
+  </p:clrMapOvr>
+</p:sld>
+</file>
+
+<file path=ppt/slides/slide20.xml><?xml version="1.0" encoding="utf-8"?>
 <p:sld xmlns:a="http://schemas.openxmlformats.org/drawingml/2006/main" xmlns:r="http://schemas.openxmlformats.org/officeDocument/2006/relationships" xmlns:p="http://schemas.openxmlformats.org/presentationml/2006/main">
   <p:cSld>
     <p:spTree>
@@ -18680,393 +19350,7 @@
 </p:sld>
 </file>
 
-<file path=ppt/slides/slide2.xml><?xml version="1.0" encoding="utf-8"?>
-<p:sld xmlns:a="http://schemas.openxmlformats.org/drawingml/2006/main" xmlns:r="http://schemas.openxmlformats.org/officeDocument/2006/relationships" xmlns:p="http://schemas.openxmlformats.org/presentationml/2006/main">
-  <p:cSld>
-    <p:spTree>
-      <p:nvGrpSpPr>
-        <p:cNvPr id="1" name=""/>
-        <p:cNvGrpSpPr/>
-        <p:nvPr/>
-      </p:nvGrpSpPr>
-      <p:grpSpPr>
-        <a:xfrm>
-          <a:off x="0" y="0"/>
-          <a:ext cx="0" cy="0"/>
-          <a:chOff x="0" y="0"/>
-          <a:chExt cx="0" cy="0"/>
-        </a:xfrm>
-      </p:grpSpPr>
-      <p:sp>
-        <p:nvSpPr>
-          <p:cNvPr id="4" name="Shape 2"/>
-          <p:cNvSpPr/>
-          <p:nvPr/>
-        </p:nvSpPr>
-        <p:spPr>
-          <a:xfrm>
-            <a:off x="320040" y="237744"/>
-            <a:ext cx="64008" cy="457200"/>
-          </a:xfrm>
-          <a:prstGeom prst="rect">
-            <a:avLst/>
-          </a:prstGeom>
-          <a:solidFill>
-            <a:srgbClr val="C8472C"/>
-          </a:solidFill>
-          <a:ln w="12700">
-            <a:solidFill>
-              <a:srgbClr val="C8472C"/>
-            </a:solidFill>
-            <a:prstDash val="solid"/>
-          </a:ln>
-        </p:spPr>
-      </p:sp>
-      <p:sp>
-        <p:nvSpPr>
-          <p:cNvPr id="5" name="Text 3"/>
-          <p:cNvSpPr/>
-          <p:nvPr/>
-        </p:nvSpPr>
-        <p:spPr>
-          <a:xfrm>
-            <a:off x="502920" y="256032"/>
-            <a:ext cx="8229600" cy="457200"/>
-          </a:xfrm>
-          <a:prstGeom prst="rect">
-            <a:avLst/>
-          </a:prstGeom>
-          <a:noFill/>
-          <a:ln/>
-        </p:spPr>
-        <p:txBody>
-          <a:bodyPr wrap="square" lIns="0" tIns="0" rIns="0" bIns="0" rtlCol="0" anchor="ctr"/>
-          <a:lstStyle/>
-          <a:p>
-            <a:pPr marL="0" indent="0" algn="l">
-              <a:buNone/>
-            </a:pPr>
-            <a:r>
-              <a:rPr lang="en-US" sz="2600" b="1" dirty="0">
-                <a:solidFill>
-                  <a:srgbClr val="1A1A1A"/>
-                </a:solidFill>
-                <a:latin typeface="Calibri" pitchFamily="34" charset="0"/>
-                <a:ea typeface="Calibri" pitchFamily="34" charset="-122"/>
-                <a:cs typeface="Calibri" pitchFamily="34" charset="-120"/>
-              </a:rPr>
-              <a:t>Motivation &amp; Scope</a:t>
-            </a:r>
-            <a:endParaRPr lang="en-US" sz="2600" dirty="0"/>
-          </a:p>
-        </p:txBody>
-      </p:sp>
-      <p:sp>
-        <p:nvSpPr>
-          <p:cNvPr id="6" name="Shape 4"/>
-          <p:cNvSpPr/>
-          <p:nvPr/>
-        </p:nvSpPr>
-        <p:spPr>
-          <a:xfrm>
-            <a:off x="320040" y="777240"/>
-            <a:ext cx="8503920" cy="0"/>
-          </a:xfrm>
-          <a:prstGeom prst="line">
-            <a:avLst/>
-          </a:prstGeom>
-          <a:noFill/>
-          <a:ln w="19050">
-            <a:solidFill>
-              <a:srgbClr val="D6E4F0"/>
-            </a:solidFill>
-            <a:prstDash val="solid"/>
-          </a:ln>
-        </p:spPr>
-      </p:sp>
-      <p:sp>
-        <p:nvSpPr>
-          <p:cNvPr id="7" name="Shape 5"/>
-          <p:cNvSpPr/>
-          <p:nvPr/>
-        </p:nvSpPr>
-        <p:spPr>
-          <a:xfrm>
-            <a:off x="725123" y="953265"/>
-            <a:ext cx="7785194" cy="960120"/>
-          </a:xfrm>
-          <a:prstGeom prst="rect">
-            <a:avLst/>
-          </a:prstGeom>
-          <a:solidFill>
-            <a:srgbClr val="D6E4F0"/>
-          </a:solidFill>
-          <a:ln w="12700">
-            <a:solidFill>
-              <a:srgbClr val="D6E4F0"/>
-            </a:solidFill>
-            <a:prstDash val="solid"/>
-          </a:ln>
-        </p:spPr>
-      </p:sp>
-      <p:sp>
-        <p:nvSpPr>
-          <p:cNvPr id="8" name="Text 6"/>
-          <p:cNvSpPr/>
-          <p:nvPr/>
-        </p:nvSpPr>
-        <p:spPr>
-          <a:xfrm>
-            <a:off x="457200" y="988696"/>
-            <a:ext cx="8229600" cy="868680"/>
-          </a:xfrm>
-          <a:prstGeom prst="rect">
-            <a:avLst/>
-          </a:prstGeom>
-          <a:noFill/>
-          <a:ln/>
-        </p:spPr>
-        <p:txBody>
-          <a:bodyPr wrap="square" rtlCol="0" anchor="ctr"/>
-          <a:lstStyle/>
-          <a:p>
-            <a:pPr marL="0" indent="0" algn="ctr">
-              <a:buNone/>
-            </a:pPr>
-            <a:r>
-              <a:rPr lang="en-US" b="1" i="1" dirty="0">
-                <a:latin typeface="Calibri" pitchFamily="34" charset="0"/>
-                <a:ea typeface="Calibri" pitchFamily="34" charset="-122"/>
-                <a:cs typeface="Calibri" pitchFamily="34" charset="-120"/>
-              </a:rPr>
-              <a:t>Can Deep Reinforcement Learning (DRL) be effectively</a:t>
-            </a:r>
-          </a:p>
-          <a:p>
-            <a:pPr marL="0" indent="0" algn="ctr">
-              <a:buNone/>
-            </a:pPr>
-            <a:r>
-              <a:rPr lang="en-US" b="1" i="1" dirty="0">
-                <a:latin typeface="Calibri" pitchFamily="34" charset="0"/>
-                <a:ea typeface="Calibri" pitchFamily="34" charset="-122"/>
-                <a:cs typeface="Calibri" pitchFamily="34" charset="-120"/>
-              </a:rPr>
-              <a:t>leveraged for autonomous exploration?</a:t>
-            </a:r>
-            <a:endParaRPr lang="en-US" b="1" dirty="0"/>
-          </a:p>
-        </p:txBody>
-      </p:sp>
-      <p:sp>
-        <p:nvSpPr>
-          <p:cNvPr id="9" name="Text 7"/>
-          <p:cNvSpPr/>
-          <p:nvPr/>
-        </p:nvSpPr>
-        <p:spPr>
-          <a:xfrm>
-            <a:off x="756524" y="2097409"/>
-            <a:ext cx="7615951" cy="1078041"/>
-          </a:xfrm>
-          <a:prstGeom prst="rect">
-            <a:avLst/>
-          </a:prstGeom>
-          <a:noFill/>
-          <a:ln/>
-        </p:spPr>
-        <p:txBody>
-          <a:bodyPr wrap="square" rtlCol="0" anchor="t"/>
-          <a:lstStyle/>
-          <a:p>
-            <a:pPr marL="190500" indent="-190500">
-              <a:spcAft>
-                <a:spcPts val="500"/>
-              </a:spcAft>
-              <a:buSzPct val="100000"/>
-              <a:buChar char="•"/>
-            </a:pPr>
-            <a:r>
-              <a:rPr lang="en-US" sz="1600" dirty="0">
-                <a:solidFill>
-                  <a:srgbClr val="1A1A1A"/>
-                </a:solidFill>
-                <a:latin typeface="Calibri" pitchFamily="34" charset="0"/>
-                <a:ea typeface="Calibri" pitchFamily="34" charset="-122"/>
-                <a:cs typeface="Calibri" pitchFamily="34" charset="-120"/>
-              </a:rPr>
-              <a:t>Autonomous exploration is a complex task</a:t>
-            </a:r>
-            <a:endParaRPr lang="en-US" sz="1600" dirty="0"/>
-          </a:p>
-          <a:p>
-            <a:pPr marL="190500" indent="-190500">
-              <a:spcAft>
-                <a:spcPts val="500"/>
-              </a:spcAft>
-              <a:buSzPct val="100000"/>
-              <a:buChar char="•"/>
-            </a:pPr>
-            <a:r>
-              <a:rPr lang="en-US" sz="1600" dirty="0">
-                <a:solidFill>
-                  <a:srgbClr val="1A1A1A"/>
-                </a:solidFill>
-                <a:latin typeface="Calibri" pitchFamily="34" charset="0"/>
-                <a:ea typeface="Calibri" pitchFamily="34" charset="-122"/>
-                <a:cs typeface="Calibri" pitchFamily="34" charset="-120"/>
-              </a:rPr>
-              <a:t>Classical analytical methods exist but present some limitations</a:t>
-            </a:r>
-            <a:endParaRPr lang="en-US" sz="1600" dirty="0"/>
-          </a:p>
-          <a:p>
-            <a:pPr marL="190500" indent="-190500">
-              <a:spcAft>
-                <a:spcPts val="500"/>
-              </a:spcAft>
-              <a:buSzPct val="100000"/>
-              <a:buChar char="•"/>
-            </a:pPr>
-            <a:r>
-              <a:rPr lang="en-US" sz="1600" dirty="0">
-                <a:solidFill>
-                  <a:srgbClr val="1A1A1A"/>
-                </a:solidFill>
-                <a:latin typeface="Calibri" pitchFamily="34" charset="0"/>
-                <a:ea typeface="Calibri" pitchFamily="34" charset="-122"/>
-                <a:cs typeface="Calibri" pitchFamily="34" charset="-120"/>
-              </a:rPr>
-              <a:t>Learning-based methods can provide more adaptive models</a:t>
-            </a:r>
-            <a:endParaRPr lang="en-US" sz="1600" dirty="0"/>
-          </a:p>
-        </p:txBody>
-      </p:sp>
-      <p:sp>
-        <p:nvSpPr>
-          <p:cNvPr id="11" name="Shape 5">
-            <a:extLst>
-              <a:ext uri="{FF2B5EF4-FFF2-40B4-BE49-F238E27FC236}">
-                <a16:creationId xmlns:a16="http://schemas.microsoft.com/office/drawing/2014/main" id="{000FCEB4-5A5B-AECB-8434-1AA1350D5054}"/>
-              </a:ext>
-            </a:extLst>
-          </p:cNvPr>
-          <p:cNvSpPr/>
-          <p:nvPr/>
-        </p:nvSpPr>
-        <p:spPr>
-          <a:xfrm>
-            <a:off x="673400" y="3324499"/>
-            <a:ext cx="7827505" cy="1140342"/>
-          </a:xfrm>
-          <a:prstGeom prst="rect">
-            <a:avLst/>
-          </a:prstGeom>
-          <a:solidFill>
-            <a:srgbClr val="D6E4F0"/>
-          </a:solidFill>
-          <a:ln w="12700">
-            <a:solidFill>
-              <a:srgbClr val="D6E4F0"/>
-            </a:solidFill>
-            <a:prstDash val="solid"/>
-          </a:ln>
-        </p:spPr>
-      </p:sp>
-      <p:sp>
-        <p:nvSpPr>
-          <p:cNvPr id="12" name="Text 6">
-            <a:extLst>
-              <a:ext uri="{FF2B5EF4-FFF2-40B4-BE49-F238E27FC236}">
-                <a16:creationId xmlns:a16="http://schemas.microsoft.com/office/drawing/2014/main" id="{0015EE5A-DA97-6AC7-337B-2E3B82A10631}"/>
-              </a:ext>
-            </a:extLst>
-          </p:cNvPr>
-          <p:cNvSpPr/>
-          <p:nvPr/>
-        </p:nvSpPr>
-        <p:spPr>
-          <a:xfrm>
-            <a:off x="1052824" y="3766303"/>
-            <a:ext cx="7023019" cy="472461"/>
-          </a:xfrm>
-          <a:prstGeom prst="rect">
-            <a:avLst/>
-          </a:prstGeom>
-          <a:noFill/>
-          <a:ln/>
-        </p:spPr>
-        <p:txBody>
-          <a:bodyPr wrap="square" rtlCol="0" anchor="ctr"/>
-          <a:lstStyle/>
-          <a:p>
-            <a:pPr marL="0" indent="0" algn="ctr">
-              <a:buNone/>
-            </a:pPr>
-            <a:r>
-              <a:rPr lang="en-US" dirty="0">
-                <a:latin typeface="Calibri" pitchFamily="34" charset="0"/>
-                <a:ea typeface="Calibri" pitchFamily="34" charset="-122"/>
-                <a:cs typeface="Calibri" pitchFamily="34" charset="-120"/>
-              </a:rPr>
-              <a:t>Develop a framework to investigate the possibility of integrating learning-based methods with classical ones</a:t>
-            </a:r>
-            <a:endParaRPr lang="en-US" dirty="0"/>
-          </a:p>
-        </p:txBody>
-      </p:sp>
-      <p:sp>
-        <p:nvSpPr>
-          <p:cNvPr id="14" name="Text 6">
-            <a:extLst>
-              <a:ext uri="{FF2B5EF4-FFF2-40B4-BE49-F238E27FC236}">
-                <a16:creationId xmlns:a16="http://schemas.microsoft.com/office/drawing/2014/main" id="{9E002ABA-51D8-44C0-5622-613A998D91FA}"/>
-              </a:ext>
-            </a:extLst>
-          </p:cNvPr>
-          <p:cNvSpPr/>
-          <p:nvPr/>
-        </p:nvSpPr>
-        <p:spPr>
-          <a:xfrm>
-            <a:off x="3909774" y="3293842"/>
-            <a:ext cx="1324451" cy="472461"/>
-          </a:xfrm>
-          <a:prstGeom prst="rect">
-            <a:avLst/>
-          </a:prstGeom>
-          <a:noFill/>
-          <a:ln/>
-        </p:spPr>
-        <p:txBody>
-          <a:bodyPr wrap="square" rtlCol="0" anchor="ctr"/>
-          <a:lstStyle/>
-          <a:p>
-            <a:pPr marL="0" indent="0" algn="ctr">
-              <a:buNone/>
-            </a:pPr>
-            <a:r>
-              <a:rPr lang="en-US" sz="2000" b="1" dirty="0">
-                <a:latin typeface="Calibri" pitchFamily="34" charset="0"/>
-                <a:ea typeface="Calibri" pitchFamily="34" charset="-122"/>
-                <a:cs typeface="Calibri" pitchFamily="34" charset="-120"/>
-              </a:rPr>
-              <a:t>Objective:</a:t>
-            </a:r>
-            <a:endParaRPr lang="en-US" sz="2000" dirty="0"/>
-          </a:p>
-        </p:txBody>
-      </p:sp>
-    </p:spTree>
-  </p:cSld>
-  <p:clrMapOvr>
-    <a:masterClrMapping/>
-  </p:clrMapOvr>
-</p:sld>
-</file>
-
-<file path=ppt/slides/slide20.xml><?xml version="1.0" encoding="utf-8"?>
+<file path=ppt/slides/slide21.xml><?xml version="1.0" encoding="utf-8"?>
 <p:sld xmlns:a="http://schemas.openxmlformats.org/drawingml/2006/main" xmlns:r="http://schemas.openxmlformats.org/officeDocument/2006/relationships" xmlns:p="http://schemas.openxmlformats.org/presentationml/2006/main">
   <p:cSld>
     <p:spTree>
@@ -23591,7 +23875,7 @@
 </p:sld>
 </file>
 
-<file path=ppt/slides/slide21.xml><?xml version="1.0" encoding="utf-8"?>
+<file path=ppt/slides/slide22.xml><?xml version="1.0" encoding="utf-8"?>
 <p:sld xmlns:a="http://schemas.openxmlformats.org/drawingml/2006/main" xmlns:r="http://schemas.openxmlformats.org/officeDocument/2006/relationships" xmlns:p="http://schemas.openxmlformats.org/presentationml/2006/main">
   <p:cSld>
     <p:spTree>
@@ -24054,7 +24338,7 @@
 </p:sld>
 </file>
 
-<file path=ppt/slides/slide22.xml><?xml version="1.0" encoding="utf-8"?>
+<file path=ppt/slides/slide23.xml><?xml version="1.0" encoding="utf-8"?>
 <p:sld xmlns:a="http://schemas.openxmlformats.org/drawingml/2006/main" xmlns:r="http://schemas.openxmlformats.org/officeDocument/2006/relationships" xmlns:p="http://schemas.openxmlformats.org/presentationml/2006/main">
   <p:cSld>
     <p:spTree>

--- a/paolo.spallanzani.pptx
+++ b/paolo.spallanzani.pptx
@@ -2287,6 +2287,62 @@
           </a:p>
         </p:txBody>
       </p:sp>
+      <p:sp>
+        <p:nvSpPr>
+          <p:cNvPr id="4" name="Text 1">
+            <a:extLst>
+              <a:ext uri="{FF2B5EF4-FFF2-40B4-BE49-F238E27FC236}">
+                <a16:creationId xmlns:a16="http://schemas.microsoft.com/office/drawing/2014/main" id="{ACDA1E67-325E-8A04-5FE7-C3C83B3FEE60}"/>
+              </a:ext>
+            </a:extLst>
+          </p:cNvPr>
+          <p:cNvSpPr/>
+          <p:nvPr userDrawn="1"/>
+        </p:nvSpPr>
+        <p:spPr>
+          <a:xfrm>
+            <a:off x="8369299" y="4849155"/>
+            <a:ext cx="613335" cy="254000"/>
+          </a:xfrm>
+          <a:prstGeom prst="rect">
+            <a:avLst/>
+          </a:prstGeom>
+          <a:noFill/>
+          <a:ln/>
+        </p:spPr>
+        <p:txBody>
+          <a:bodyPr wrap="square" rtlCol="0" anchor="ctr"/>
+          <a:lstStyle/>
+          <a:p>
+            <a:pPr marL="0" indent="0" algn="r">
+              <a:buNone/>
+            </a:pPr>
+            <a:fld id="{BB13C8F1-19BB-4BF8-8A7D-0DCD894710BA}" type="slidenum">
+              <a:rPr lang="en-US" sz="900" smtClean="0">
+                <a:solidFill>
+                  <a:srgbClr val="BBBBBB"/>
+                </a:solidFill>
+                <a:latin typeface="Calibri" pitchFamily="34" charset="0"/>
+                <a:ea typeface="Calibri" pitchFamily="34" charset="-122"/>
+                <a:cs typeface="Calibri" pitchFamily="34" charset="-120"/>
+              </a:rPr>
+              <a:t>‹N›</a:t>
+            </a:fld>
+            <a:r>
+              <a:rPr lang="en-US" sz="900" dirty="0">
+                <a:solidFill>
+                  <a:srgbClr val="BBBBBB"/>
+                </a:solidFill>
+                <a:latin typeface="Calibri" pitchFamily="34" charset="0"/>
+                <a:ea typeface="Calibri" pitchFamily="34" charset="-122"/>
+                <a:cs typeface="Calibri" pitchFamily="34" charset="-120"/>
+              </a:rPr>
+              <a:t> / 21</a:t>
+            </a:r>
+            <a:endParaRPr lang="en-US" sz="900" dirty="0"/>
+          </a:p>
+        </p:txBody>
+      </p:sp>
     </p:spTree>
     <p:extLst>
       <p:ext uri="{BB962C8B-B14F-4D97-AF65-F5344CB8AC3E}">
@@ -3533,7 +3589,7 @@
     <p:sldLayoutId id="2147483669" r:id="rId4"/>
     <p:sldLayoutId id="2147483670" r:id="rId5"/>
   </p:sldLayoutIdLst>
-  <p:hf sldNum="0" hdr="0" ftr="0" dt="0"/>
+  <p:hf hdr="0" ftr="0" dt="0"/>
   <p:txStyles>
     <p:titleStyle>
       <a:lvl1pPr algn="ctr" defTabSz="914400" rtl="0" eaLnBrk="1" latinLnBrk="0" hangingPunct="1">
@@ -3825,7 +3881,7 @@
     <p:sldLayoutId id="2147483667" r:id="rId2"/>
     <p:sldLayoutId id="2147483668" r:id="rId3"/>
   </p:sldLayoutIdLst>
-  <p:hf sldNum="0" hdr="0" ftr="0" dt="0"/>
+  <p:hf hdr="0" ftr="0" dt="0"/>
   <p:txStyles>
     <p:titleStyle>
       <a:lvl1pPr algn="l" defTabSz="914400" rtl="0" eaLnBrk="1" latinLnBrk="0" hangingPunct="1">
@@ -5528,6 +5584,80 @@
           </a:p>
         </p:txBody>
       </p:sp>
+      <p:pic>
+        <p:nvPicPr>
+          <p:cNvPr id="3" name="Immagine 2">
+            <a:extLst>
+              <a:ext uri="{FF2B5EF4-FFF2-40B4-BE49-F238E27FC236}">
+                <a16:creationId xmlns:a16="http://schemas.microsoft.com/office/drawing/2014/main" id="{5281CF82-307E-F618-033F-62CD3F8360F1}"/>
+              </a:ext>
+            </a:extLst>
+          </p:cNvPr>
+          <p:cNvPicPr>
+            <a:picLocks noChangeAspect="1"/>
+          </p:cNvPicPr>
+          <p:nvPr/>
+        </p:nvPicPr>
+        <p:blipFill>
+          <a:blip r:embed="rId6"/>
+          <a:stretch>
+            <a:fillRect/>
+          </a:stretch>
+        </p:blipFill>
+        <p:spPr>
+          <a:xfrm>
+            <a:off x="4775033" y="1978638"/>
+            <a:ext cx="719573" cy="491247"/>
+          </a:xfrm>
+          <a:prstGeom prst="rect">
+            <a:avLst/>
+          </a:prstGeom>
+        </p:spPr>
+      </p:pic>
+      <p:cxnSp>
+        <p:nvCxnSpPr>
+          <p:cNvPr id="8" name="Connettore 2 7">
+            <a:extLst>
+              <a:ext uri="{FF2B5EF4-FFF2-40B4-BE49-F238E27FC236}">
+                <a16:creationId xmlns:a16="http://schemas.microsoft.com/office/drawing/2014/main" id="{DACE5ED0-46BC-8D6E-D8AE-07DEEAB5EE85}"/>
+              </a:ext>
+            </a:extLst>
+          </p:cNvPr>
+          <p:cNvCxnSpPr>
+            <a:cxnSpLocks/>
+          </p:cNvCxnSpPr>
+          <p:nvPr/>
+        </p:nvCxnSpPr>
+        <p:spPr>
+          <a:xfrm flipH="1" flipV="1">
+            <a:off x="5170420" y="2411110"/>
+            <a:ext cx="2866299" cy="871004"/>
+          </a:xfrm>
+          <a:prstGeom prst="straightConnector1">
+            <a:avLst/>
+          </a:prstGeom>
+          <a:ln w="19050">
+            <a:solidFill>
+              <a:srgbClr val="06A87E"/>
+            </a:solidFill>
+            <a:tailEnd type="triangle"/>
+          </a:ln>
+        </p:spPr>
+        <p:style>
+          <a:lnRef idx="1">
+            <a:schemeClr val="accent1"/>
+          </a:lnRef>
+          <a:fillRef idx="0">
+            <a:schemeClr val="accent1"/>
+          </a:fillRef>
+          <a:effectRef idx="0">
+            <a:schemeClr val="accent1"/>
+          </a:effectRef>
+          <a:fontRef idx="minor">
+            <a:schemeClr val="tx1"/>
+          </a:fontRef>
+        </p:style>
+      </p:cxnSp>
     </p:spTree>
   </p:cSld>
   <p:clrMapOvr>
@@ -11751,6 +11881,84 @@
           </a:p>
         </p:txBody>
       </p:sp>
+      <p:pic>
+        <p:nvPicPr>
+          <p:cNvPr id="2" name="video_smondy">
+            <a:hlinkClick r:id="" action="ppaction://media"/>
+            <a:extLst>
+              <a:ext uri="{FF2B5EF4-FFF2-40B4-BE49-F238E27FC236}">
+                <a16:creationId xmlns:a16="http://schemas.microsoft.com/office/drawing/2014/main" id="{1FAA1FE8-94DE-E65A-D001-2E311FB9A4E2}"/>
+              </a:ext>
+            </a:extLst>
+          </p:cNvPr>
+          <p:cNvPicPr>
+            <a:picLocks noChangeAspect="1"/>
+          </p:cNvPicPr>
+          <p:nvPr>
+            <a:videoFile r:link="rId1"/>
+            <p:extLst>
+              <p:ext uri="{DAA4B4D4-6D71-4841-9C94-3DE7FCFB9230}">
+                <p14:media xmlns:p14="http://schemas.microsoft.com/office/powerpoint/2010/main" r:embed="rId2">
+                  <p14:trim end="114594"/>
+                </p14:media>
+              </p:ext>
+            </p:extLst>
+          </p:nvPr>
+        </p:nvPicPr>
+        <p:blipFill>
+          <a:blip r:embed="rId7"/>
+          <a:stretch>
+            <a:fillRect/>
+          </a:stretch>
+        </p:blipFill>
+        <p:spPr>
+          <a:xfrm>
+            <a:off x="108255" y="1593444"/>
+            <a:ext cx="4680000" cy="2340000"/>
+          </a:xfrm>
+          <a:prstGeom prst="rect">
+            <a:avLst/>
+          </a:prstGeom>
+        </p:spPr>
+      </p:pic>
+      <p:pic>
+        <p:nvPicPr>
+          <p:cNvPr id="3" name="video_still">
+            <a:hlinkClick r:id="" action="ppaction://media"/>
+            <a:extLst>
+              <a:ext uri="{FF2B5EF4-FFF2-40B4-BE49-F238E27FC236}">
+                <a16:creationId xmlns:a16="http://schemas.microsoft.com/office/drawing/2014/main" id="{551FA13A-8473-CA72-B2BD-9BD861BFCF78}"/>
+              </a:ext>
+            </a:extLst>
+          </p:cNvPr>
+          <p:cNvPicPr>
+            <a:picLocks noChangeAspect="1"/>
+          </p:cNvPicPr>
+          <p:nvPr>
+            <a:videoFile r:link="rId4"/>
+            <p:extLst>
+              <p:ext uri="{DAA4B4D4-6D71-4841-9C94-3DE7FCFB9230}">
+                <p14:media xmlns:p14="http://schemas.microsoft.com/office/powerpoint/2010/main" r:embed="rId3"/>
+              </p:ext>
+            </p:extLst>
+          </p:nvPr>
+        </p:nvPicPr>
+        <p:blipFill>
+          <a:blip r:embed="rId8"/>
+          <a:stretch>
+            <a:fillRect/>
+          </a:stretch>
+        </p:blipFill>
+        <p:spPr>
+          <a:xfrm>
+            <a:off x="4360993" y="1595800"/>
+            <a:ext cx="4680000" cy="2340000"/>
+          </a:xfrm>
+          <a:prstGeom prst="rect">
+            <a:avLst/>
+          </a:prstGeom>
+        </p:spPr>
+      </p:pic>
     </p:spTree>
     <p:extLst>
       <p:ext uri="{BB962C8B-B14F-4D97-AF65-F5344CB8AC3E}">
@@ -11761,6 +11969,246 @@
   <p:clrMapOvr>
     <a:masterClrMapping/>
   </p:clrMapOvr>
+  <p:timing>
+    <p:tnLst>
+      <p:par>
+        <p:cTn id="1" dur="indefinite" restart="never" nodeType="tmRoot">
+          <p:childTnLst>
+            <p:seq concurrent="1" nextAc="seek">
+              <p:cTn id="2" dur="indefinite" nodeType="mainSeq">
+                <p:childTnLst>
+                  <p:par>
+                    <p:cTn id="3" fill="hold">
+                      <p:stCondLst>
+                        <p:cond delay="indefinite"/>
+                      </p:stCondLst>
+                      <p:childTnLst>
+                        <p:par>
+                          <p:cTn id="4" fill="hold">
+                            <p:stCondLst>
+                              <p:cond delay="0"/>
+                            </p:stCondLst>
+                            <p:childTnLst>
+                              <p:par>
+                                <p:cTn id="5" presetID="1" presetClass="mediacall" presetSubtype="0" fill="hold" nodeType="clickEffect">
+                                  <p:stCondLst>
+                                    <p:cond delay="0"/>
+                                  </p:stCondLst>
+                                  <p:childTnLst>
+                                    <p:cmd type="call" cmd="playFrom(0.0)">
+                                      <p:cBhvr>
+                                        <p:cTn id="6" dur="10656" fill="hold"/>
+                                        <p:tgtEl>
+                                          <p:spTgt spid="2"/>
+                                        </p:tgtEl>
+                                      </p:cBhvr>
+                                    </p:cmd>
+                                  </p:childTnLst>
+                                </p:cTn>
+                              </p:par>
+                            </p:childTnLst>
+                          </p:cTn>
+                        </p:par>
+                      </p:childTnLst>
+                    </p:cTn>
+                  </p:par>
+                  <p:par>
+                    <p:cTn id="7" fill="hold">
+                      <p:stCondLst>
+                        <p:cond delay="indefinite"/>
+                      </p:stCondLst>
+                      <p:childTnLst>
+                        <p:par>
+                          <p:cTn id="8" fill="hold">
+                            <p:stCondLst>
+                              <p:cond delay="0"/>
+                            </p:stCondLst>
+                            <p:childTnLst>
+                              <p:par>
+                                <p:cTn id="9" presetID="1" presetClass="mediacall" presetSubtype="0" fill="hold" nodeType="clickEffect">
+                                  <p:stCondLst>
+                                    <p:cond delay="0"/>
+                                  </p:stCondLst>
+                                  <p:childTnLst>
+                                    <p:cmd type="call" cmd="playFrom(0.0)">
+                                      <p:cBhvr>
+                                        <p:cTn id="10" dur="500" fill="hold"/>
+                                        <p:tgtEl>
+                                          <p:spTgt spid="3"/>
+                                        </p:tgtEl>
+                                      </p:cBhvr>
+                                    </p:cmd>
+                                  </p:childTnLst>
+                                </p:cTn>
+                              </p:par>
+                            </p:childTnLst>
+                          </p:cTn>
+                        </p:par>
+                      </p:childTnLst>
+                    </p:cTn>
+                  </p:par>
+                </p:childTnLst>
+              </p:cTn>
+              <p:prevCondLst>
+                <p:cond evt="onPrev" delay="0">
+                  <p:tgtEl>
+                    <p:sldTgt/>
+                  </p:tgtEl>
+                </p:cond>
+              </p:prevCondLst>
+              <p:nextCondLst>
+                <p:cond evt="onNext" delay="0">
+                  <p:tgtEl>
+                    <p:sldTgt/>
+                  </p:tgtEl>
+                </p:cond>
+              </p:nextCondLst>
+            </p:seq>
+            <p:video>
+              <p:cMediaNode vol="80000">
+                <p:cTn id="11" fill="hold" display="0">
+                  <p:stCondLst>
+                    <p:cond delay="indefinite"/>
+                  </p:stCondLst>
+                </p:cTn>
+                <p:tgtEl>
+                  <p:spTgt spid="2"/>
+                </p:tgtEl>
+              </p:cMediaNode>
+            </p:video>
+            <p:seq concurrent="1" nextAc="seek">
+              <p:cTn id="12" restart="whenNotActive" fill="hold" evtFilter="cancelBubble" nodeType="interactiveSeq">
+                <p:stCondLst>
+                  <p:cond evt="onClick" delay="0">
+                    <p:tgtEl>
+                      <p:spTgt spid="2"/>
+                    </p:tgtEl>
+                  </p:cond>
+                </p:stCondLst>
+                <p:endSync evt="end" delay="0">
+                  <p:rtn val="all"/>
+                </p:endSync>
+                <p:childTnLst>
+                  <p:par>
+                    <p:cTn id="13" fill="hold">
+                      <p:stCondLst>
+                        <p:cond delay="0"/>
+                      </p:stCondLst>
+                      <p:childTnLst>
+                        <p:par>
+                          <p:cTn id="14" fill="hold">
+                            <p:stCondLst>
+                              <p:cond delay="0"/>
+                            </p:stCondLst>
+                            <p:childTnLst>
+                              <p:par>
+                                <p:cTn id="15" presetID="2" presetClass="mediacall" presetSubtype="0" fill="hold" nodeType="clickEffect">
+                                  <p:stCondLst>
+                                    <p:cond delay="0"/>
+                                  </p:stCondLst>
+                                  <p:childTnLst>
+                                    <p:cmd type="call" cmd="togglePause">
+                                      <p:cBhvr>
+                                        <p:cTn id="16" dur="1" fill="hold"/>
+                                        <p:tgtEl>
+                                          <p:spTgt spid="2"/>
+                                        </p:tgtEl>
+                                      </p:cBhvr>
+                                    </p:cmd>
+                                  </p:childTnLst>
+                                </p:cTn>
+                              </p:par>
+                            </p:childTnLst>
+                          </p:cTn>
+                        </p:par>
+                      </p:childTnLst>
+                    </p:cTn>
+                  </p:par>
+                </p:childTnLst>
+              </p:cTn>
+              <p:nextCondLst>
+                <p:cond evt="onClick" delay="0">
+                  <p:tgtEl>
+                    <p:spTgt spid="2"/>
+                  </p:tgtEl>
+                </p:cond>
+              </p:nextCondLst>
+            </p:seq>
+            <p:video>
+              <p:cMediaNode vol="80000">
+                <p:cTn id="17" fill="hold" display="0">
+                  <p:stCondLst>
+                    <p:cond delay="indefinite"/>
+                  </p:stCondLst>
+                </p:cTn>
+                <p:tgtEl>
+                  <p:spTgt spid="3"/>
+                </p:tgtEl>
+              </p:cMediaNode>
+            </p:video>
+            <p:seq concurrent="1" nextAc="seek">
+              <p:cTn id="18" restart="whenNotActive" fill="hold" evtFilter="cancelBubble" nodeType="interactiveSeq">
+                <p:stCondLst>
+                  <p:cond evt="onClick" delay="0">
+                    <p:tgtEl>
+                      <p:spTgt spid="3"/>
+                    </p:tgtEl>
+                  </p:cond>
+                </p:stCondLst>
+                <p:endSync evt="end" delay="0">
+                  <p:rtn val="all"/>
+                </p:endSync>
+                <p:childTnLst>
+                  <p:par>
+                    <p:cTn id="19" fill="hold">
+                      <p:stCondLst>
+                        <p:cond delay="0"/>
+                      </p:stCondLst>
+                      <p:childTnLst>
+                        <p:par>
+                          <p:cTn id="20" fill="hold">
+                            <p:stCondLst>
+                              <p:cond delay="0"/>
+                            </p:stCondLst>
+                            <p:childTnLst>
+                              <p:par>
+                                <p:cTn id="21" presetID="2" presetClass="mediacall" presetSubtype="0" fill="hold" nodeType="clickEffect">
+                                  <p:stCondLst>
+                                    <p:cond delay="0"/>
+                                  </p:stCondLst>
+                                  <p:childTnLst>
+                                    <p:cmd type="call" cmd="togglePause">
+                                      <p:cBhvr>
+                                        <p:cTn id="22" dur="1" fill="hold"/>
+                                        <p:tgtEl>
+                                          <p:spTgt spid="3"/>
+                                        </p:tgtEl>
+                                      </p:cBhvr>
+                                    </p:cmd>
+                                  </p:childTnLst>
+                                </p:cTn>
+                              </p:par>
+                            </p:childTnLst>
+                          </p:cTn>
+                        </p:par>
+                      </p:childTnLst>
+                    </p:cTn>
+                  </p:par>
+                </p:childTnLst>
+              </p:cTn>
+              <p:nextCondLst>
+                <p:cond evt="onClick" delay="0">
+                  <p:tgtEl>
+                    <p:spTgt spid="3"/>
+                  </p:tgtEl>
+                </p:cond>
+              </p:nextCondLst>
+            </p:seq>
+          </p:childTnLst>
+        </p:cTn>
+      </p:par>
+    </p:tnLst>
+  </p:timing>
 </p:sld>
 </file>
 
@@ -13564,45 +14012,6 @@
             <a:prstDash val="solid"/>
           </a:ln>
         </p:spPr>
-      </p:sp>
-      <p:sp>
-        <p:nvSpPr>
-          <p:cNvPr id="3" name="Text 1"/>
-          <p:cNvSpPr/>
-          <p:nvPr/>
-        </p:nvSpPr>
-        <p:spPr>
-          <a:xfrm>
-            <a:off x="8315325" y="4773168"/>
-            <a:ext cx="554355" cy="274320"/>
-          </a:xfrm>
-          <a:prstGeom prst="rect">
-            <a:avLst/>
-          </a:prstGeom>
-          <a:noFill/>
-          <a:ln/>
-        </p:spPr>
-        <p:txBody>
-          <a:bodyPr wrap="square" rtlCol="0" anchor="ctr"/>
-          <a:lstStyle/>
-          <a:p>
-            <a:pPr marL="0" indent="0" algn="r">
-              <a:buNone/>
-            </a:pPr>
-            <a:r>
-              <a:rPr lang="en-US" sz="900" dirty="0">
-                <a:solidFill>
-                  <a:srgbClr val="BBBBBB"/>
-                </a:solidFill>
-                <a:latin typeface="Calibri" pitchFamily="34" charset="0"/>
-                <a:ea typeface="Calibri" pitchFamily="34" charset="-122"/>
-                <a:cs typeface="Calibri" pitchFamily="34" charset="-120"/>
-              </a:rPr>
-              <a:t>13 / 17</a:t>
-            </a:r>
-            <a:endParaRPr lang="en-US" sz="900" dirty="0"/>
-          </a:p>
-        </p:txBody>
       </p:sp>
       <p:sp>
         <p:nvSpPr>
@@ -16416,8 +16825,8 @@
         </p:nvSpPr>
         <p:spPr>
           <a:xfrm>
-            <a:off x="502920" y="2252281"/>
-            <a:ext cx="8148161" cy="1920237"/>
+            <a:off x="621507" y="2252281"/>
+            <a:ext cx="7824584" cy="1819657"/>
           </a:xfrm>
           <a:prstGeom prst="rect">
             <a:avLst/>
@@ -16447,8 +16856,8 @@
         </p:nvSpPr>
         <p:spPr>
           <a:xfrm>
-            <a:off x="588648" y="2803202"/>
-            <a:ext cx="5280661" cy="1047754"/>
+            <a:off x="697910" y="2803202"/>
+            <a:ext cx="5171399" cy="1047754"/>
           </a:xfrm>
           <a:prstGeom prst="rect">
             <a:avLst/>
@@ -16538,7 +16947,7 @@
         </p:nvSpPr>
         <p:spPr>
           <a:xfrm>
-            <a:off x="5960747" y="3034084"/>
+            <a:off x="5896451" y="3034084"/>
             <a:ext cx="2766061" cy="341376"/>
           </a:xfrm>
           <a:prstGeom prst="rect">
@@ -16580,13 +16989,15 @@
               </a:ext>
             </a:extLst>
           </p:cNvPr>
-          <p:cNvCxnSpPr/>
+          <p:cNvCxnSpPr>
+            <a:cxnSpLocks/>
+          </p:cNvCxnSpPr>
           <p:nvPr/>
         </p:nvCxnSpPr>
         <p:spPr>
           <a:xfrm>
-            <a:off x="5629278" y="3296978"/>
-            <a:ext cx="533400" cy="0"/>
+            <a:off x="5793575" y="3296978"/>
+            <a:ext cx="304807" cy="0"/>
           </a:xfrm>
           <a:prstGeom prst="straightConnector1">
             <a:avLst/>
@@ -18317,8 +18728,8 @@
         </p:nvSpPr>
         <p:spPr>
           <a:xfrm>
-            <a:off x="542928" y="2394014"/>
-            <a:ext cx="8229600" cy="274320"/>
+            <a:off x="713206" y="2394014"/>
+            <a:ext cx="8059322" cy="274320"/>
           </a:xfrm>
           <a:prstGeom prst="rect">
             <a:avLst/>
@@ -24393,45 +24804,6 @@
       </p:grpSpPr>
       <p:sp>
         <p:nvSpPr>
-          <p:cNvPr id="3" name="Text 1"/>
-          <p:cNvSpPr/>
-          <p:nvPr/>
-        </p:nvSpPr>
-        <p:spPr>
-          <a:xfrm>
-            <a:off x="8412480" y="4846320"/>
-            <a:ext cx="457200" cy="201168"/>
-          </a:xfrm>
-          <a:prstGeom prst="rect">
-            <a:avLst/>
-          </a:prstGeom>
-          <a:noFill/>
-          <a:ln/>
-        </p:spPr>
-        <p:txBody>
-          <a:bodyPr wrap="square" rtlCol="0" anchor="ctr"/>
-          <a:lstStyle/>
-          <a:p>
-            <a:pPr marL="0" indent="0" algn="r">
-              <a:buNone/>
-            </a:pPr>
-            <a:r>
-              <a:rPr lang="en-US" sz="900" dirty="0">
-                <a:solidFill>
-                  <a:srgbClr val="BBBBBB"/>
-                </a:solidFill>
-                <a:latin typeface="Calibri" pitchFamily="34" charset="0"/>
-                <a:ea typeface="Calibri" pitchFamily="34" charset="-122"/>
-                <a:cs typeface="Calibri" pitchFamily="34" charset="-120"/>
-              </a:rPr>
-              <a:t>4 / 17</a:t>
-            </a:r>
-            <a:endParaRPr lang="en-US" sz="900" dirty="0"/>
-          </a:p>
-        </p:txBody>
-      </p:sp>
-      <p:sp>
-        <p:nvSpPr>
           <p:cNvPr id="4" name="Shape 2"/>
           <p:cNvSpPr/>
           <p:nvPr/>
@@ -24935,45 +25307,6 @@
           <a:chExt cx="0" cy="0"/>
         </a:xfrm>
       </p:grpSpPr>
-      <p:sp>
-        <p:nvSpPr>
-          <p:cNvPr id="3" name="Text 1"/>
-          <p:cNvSpPr/>
-          <p:nvPr/>
-        </p:nvSpPr>
-        <p:spPr>
-          <a:xfrm>
-            <a:off x="8412480" y="4846320"/>
-            <a:ext cx="457200" cy="201168"/>
-          </a:xfrm>
-          <a:prstGeom prst="rect">
-            <a:avLst/>
-          </a:prstGeom>
-          <a:noFill/>
-          <a:ln/>
-        </p:spPr>
-        <p:txBody>
-          <a:bodyPr wrap="square" rtlCol="0" anchor="ctr"/>
-          <a:lstStyle/>
-          <a:p>
-            <a:pPr marL="0" indent="0" algn="r">
-              <a:buNone/>
-            </a:pPr>
-            <a:r>
-              <a:rPr lang="en-US" sz="900" dirty="0">
-                <a:solidFill>
-                  <a:srgbClr val="BBBBBB"/>
-                </a:solidFill>
-                <a:latin typeface="Calibri" pitchFamily="34" charset="0"/>
-                <a:ea typeface="Calibri" pitchFamily="34" charset="-122"/>
-                <a:cs typeface="Calibri" pitchFamily="34" charset="-120"/>
-              </a:rPr>
-              <a:t>4 / 17</a:t>
-            </a:r>
-            <a:endParaRPr lang="en-US" sz="900" dirty="0"/>
-          </a:p>
-        </p:txBody>
-      </p:sp>
       <p:sp>
         <p:nvSpPr>
           <p:cNvPr id="4" name="Shape 2"/>
@@ -25524,8 +25857,8 @@
           </a:p>
         </p:txBody>
       </p:sp>
-      <mc:AlternateContent xmlns:mc="http://schemas.openxmlformats.org/markup-compatibility/2006" xmlns:a14="http://schemas.microsoft.com/office/drawing/2010/main">
-        <mc:Choice Requires="a14">
+      <mc:AlternateContent xmlns:mc="http://schemas.openxmlformats.org/markup-compatibility/2006">
+        <mc:Choice xmlns:a14="http://schemas.microsoft.com/office/drawing/2010/main" Requires="a14">
           <p:sp>
             <p:nvSpPr>
               <p:cNvPr id="9" name="Text 8">
@@ -26059,6 +26392,23 @@
                   <a:buSzPct val="100000"/>
                   <a:buChar char="•"/>
                 </a:pPr>
+                <a:endParaRPr lang="en-US" sz="1300" dirty="0">
+                  <a:solidFill>
+                    <a:srgbClr val="1A1A1A"/>
+                  </a:solidFill>
+                  <a:latin typeface="Calibri" pitchFamily="34" charset="0"/>
+                  <a:ea typeface="Calibri" pitchFamily="34" charset="-122"/>
+                  <a:cs typeface="Calibri" pitchFamily="34" charset="-120"/>
+                </a:endParaRPr>
+              </a:p>
+              <a:p>
+                <a:pPr marL="190500" indent="-190500">
+                  <a:spcAft>
+                    <a:spcPts val="500"/>
+                  </a:spcAft>
+                  <a:buSzPct val="100000"/>
+                  <a:buChar char="•"/>
+                </a:pPr>
                 <a:r>
                   <a:rPr lang="en-US" sz="1300" dirty="0">
                     <a:solidFill>
@@ -26194,7 +26544,7 @@
             </p:txBody>
           </p:sp>
         </mc:Choice>
-        <mc:Fallback xmlns="">
+        <mc:Fallback>
           <p:sp>
             <p:nvSpPr>
               <p:cNvPr id="9" name="Text 8">
@@ -26262,7 +26612,7 @@
         </p:blipFill>
         <p:spPr>
           <a:xfrm>
-            <a:off x="1626766" y="3677263"/>
+            <a:off x="1626766" y="3841575"/>
             <a:ext cx="3113669" cy="483156"/>
           </a:xfrm>
           <a:prstGeom prst="rect">
@@ -26292,7 +26642,7 @@
         </p:blipFill>
         <p:spPr>
           <a:xfrm>
-            <a:off x="2093522" y="2304119"/>
+            <a:off x="2093522" y="2268399"/>
             <a:ext cx="1976851" cy="494213"/>
           </a:xfrm>
           <a:prstGeom prst="rect">
@@ -26314,8 +26664,8 @@
         </p:nvSpPr>
         <p:spPr>
           <a:xfrm>
-            <a:off x="2043514" y="2304119"/>
-            <a:ext cx="2078853" cy="494213"/>
+            <a:off x="2043514" y="2289831"/>
+            <a:ext cx="2078853" cy="439081"/>
           </a:xfrm>
           <a:prstGeom prst="rect">
             <a:avLst/>
@@ -26343,8 +26693,8 @@
         </p:nvSpPr>
         <p:spPr>
           <a:xfrm>
-            <a:off x="1626766" y="3647386"/>
-            <a:ext cx="3130972" cy="571714"/>
+            <a:off x="1626766" y="3833130"/>
+            <a:ext cx="3130972" cy="494213"/>
           </a:xfrm>
           <a:prstGeom prst="rect">
             <a:avLst/>
@@ -26493,8 +26843,8 @@
         </p:nvSpPr>
         <p:spPr>
           <a:xfrm>
-            <a:off x="457200" y="1208719"/>
-            <a:ext cx="4321969" cy="858176"/>
+            <a:off x="457200" y="1208718"/>
+            <a:ext cx="4219515" cy="1363031"/>
           </a:xfrm>
           <a:prstGeom prst="rect">
             <a:avLst/>
@@ -26505,6 +26855,26 @@
         <p:txBody>
           <a:bodyPr wrap="square" rtlCol="0" anchor="t"/>
           <a:lstStyle/>
+          <a:p>
+            <a:pPr marL="190500" indent="-190500">
+              <a:spcAft>
+                <a:spcPts val="500"/>
+              </a:spcAft>
+              <a:buSzPct val="100000"/>
+              <a:buChar char="•"/>
+            </a:pPr>
+            <a:r>
+              <a:rPr lang="en-US" sz="1300" dirty="0">
+                <a:solidFill>
+                  <a:srgbClr val="1A1A1A"/>
+                </a:solidFill>
+                <a:latin typeface="Calibri" pitchFamily="34" charset="0"/>
+                <a:ea typeface="Calibri" pitchFamily="34" charset="-122"/>
+                <a:cs typeface="Calibri" pitchFamily="34" charset="-120"/>
+              </a:rPr>
+              <a:t>The Q-function is learned directly, the policy is a greedy heuristic</a:t>
+            </a:r>
+          </a:p>
           <a:p>
             <a:pPr marL="190500" indent="-190500">
               <a:spcAft>
@@ -26535,6 +26905,54 @@
               </a:rPr>
               <a:t> allows to iteratively estimate the Q-function from experience</a:t>
             </a:r>
+          </a:p>
+          <a:p>
+            <a:pPr marL="190500" indent="-190500">
+              <a:spcAft>
+                <a:spcPts val="500"/>
+              </a:spcAft>
+              <a:buSzPct val="100000"/>
+              <a:buFontTx/>
+              <a:buChar char="•"/>
+            </a:pPr>
+            <a:r>
+              <a:rPr lang="en-US" sz="1300" dirty="0">
+                <a:solidFill>
+                  <a:srgbClr val="1A1A1A"/>
+                </a:solidFill>
+                <a:latin typeface="Calibri" pitchFamily="34" charset="0"/>
+                <a:ea typeface="Calibri" pitchFamily="34" charset="-122"/>
+                <a:cs typeface="Calibri" pitchFamily="34" charset="-120"/>
+              </a:rPr>
+              <a:t>In Q-learning the Q-function is encoded in a table called </a:t>
+            </a:r>
+            <a:r>
+              <a:rPr lang="en-US" sz="1300" b="1" dirty="0">
+                <a:solidFill>
+                  <a:srgbClr val="1A1A1A"/>
+                </a:solidFill>
+                <a:latin typeface="Calibri" pitchFamily="34" charset="0"/>
+                <a:ea typeface="Calibri" pitchFamily="34" charset="-122"/>
+                <a:cs typeface="Calibri" pitchFamily="34" charset="-120"/>
+              </a:rPr>
+              <a:t>Q-table</a:t>
+            </a:r>
+          </a:p>
+          <a:p>
+            <a:pPr>
+              <a:spcAft>
+                <a:spcPts val="500"/>
+              </a:spcAft>
+              <a:buSzPct val="100000"/>
+            </a:pPr>
+            <a:endParaRPr lang="en-US" sz="1300" dirty="0">
+              <a:solidFill>
+                <a:srgbClr val="1A1A1A"/>
+              </a:solidFill>
+              <a:latin typeface="Calibri" pitchFamily="34" charset="0"/>
+              <a:ea typeface="Calibri" pitchFamily="34" charset="-122"/>
+              <a:cs typeface="Calibri" pitchFamily="34" charset="-120"/>
+            </a:endParaRPr>
           </a:p>
           <a:p>
             <a:pPr>
@@ -26576,7 +26994,7 @@
         </p:blipFill>
         <p:spPr>
           <a:xfrm>
-            <a:off x="4905235" y="3210167"/>
+            <a:off x="4905235" y="3595943"/>
             <a:ext cx="3880052" cy="968554"/>
           </a:xfrm>
           <a:prstGeom prst="rect">
@@ -26606,7 +27024,7 @@
         </p:blipFill>
         <p:spPr>
           <a:xfrm>
-            <a:off x="4905235" y="1525226"/>
+            <a:off x="4905235" y="2134932"/>
             <a:ext cx="3832365" cy="956651"/>
           </a:xfrm>
           <a:prstGeom prst="rect">
@@ -26614,39 +27032,8 @@
           </a:prstGeom>
         </p:spPr>
       </p:pic>
-      <p:pic>
-        <p:nvPicPr>
-          <p:cNvPr id="7" name="Immagine 6">
-            <a:extLst>
-              <a:ext uri="{FF2B5EF4-FFF2-40B4-BE49-F238E27FC236}">
-                <a16:creationId xmlns:a16="http://schemas.microsoft.com/office/drawing/2014/main" id="{1463F26B-8A19-3D34-2B5F-CEB841A4DFF6}"/>
-              </a:ext>
-            </a:extLst>
-          </p:cNvPr>
-          <p:cNvPicPr>
-            <a:picLocks noChangeAspect="1"/>
-          </p:cNvPicPr>
-          <p:nvPr/>
-        </p:nvPicPr>
-        <p:blipFill>
-          <a:blip r:embed="rId4"/>
-          <a:srcRect t="73066"/>
-          <a:stretch>
-            <a:fillRect/>
-          </a:stretch>
-        </p:blipFill>
-        <p:spPr>
-          <a:xfrm>
-            <a:off x="455472" y="2043457"/>
-            <a:ext cx="4055533" cy="368262"/>
-          </a:xfrm>
-          <a:prstGeom prst="rect">
-            <a:avLst/>
-          </a:prstGeom>
-        </p:spPr>
-      </p:pic>
-      <mc:AlternateContent xmlns:mc="http://schemas.openxmlformats.org/markup-compatibility/2006" xmlns:a14="http://schemas.microsoft.com/office/drawing/2010/main">
-        <mc:Choice Requires="a14">
+      <mc:AlternateContent xmlns:mc="http://schemas.openxmlformats.org/markup-compatibility/2006">
+        <mc:Choice xmlns:a14="http://schemas.microsoft.com/office/drawing/2010/main" Requires="a14">
           <p:sp>
             <p:nvSpPr>
               <p:cNvPr id="15" name="Text 8">
@@ -26661,8 +27048,8 @@
             </p:nvSpPr>
             <p:spPr>
               <a:xfrm>
-                <a:off x="543988" y="3376333"/>
-                <a:ext cx="4361247" cy="956651"/>
+                <a:off x="543988" y="3226309"/>
+                <a:ext cx="4285981" cy="956651"/>
               </a:xfrm>
               <a:prstGeom prst="rect">
                 <a:avLst/>
@@ -26812,7 +27199,7 @@
             </p:txBody>
           </p:sp>
         </mc:Choice>
-        <mc:Fallback xmlns="">
+        <mc:Fallback>
           <p:sp>
             <p:nvSpPr>
               <p:cNvPr id="15" name="Text 8">
@@ -26829,16 +27216,16 @@
             </p:nvSpPr>
             <p:spPr>
               <a:xfrm>
-                <a:off x="543988" y="3376333"/>
-                <a:ext cx="4361247" cy="956651"/>
+                <a:off x="543988" y="3226309"/>
+                <a:ext cx="4285981" cy="956651"/>
               </a:xfrm>
               <a:prstGeom prst="rect">
                 <a:avLst/>
               </a:prstGeom>
               <a:blipFill>
-                <a:blip r:embed="rId5"/>
+                <a:blip r:embed="rId4"/>
                 <a:stretch>
-                  <a:fillRect l="-279" t="-1274" b="-4459"/>
+                  <a:fillRect l="-284" t="-1274" b="-4459"/>
                 </a:stretch>
               </a:blipFill>
               <a:ln/>
@@ -26872,7 +27259,7 @@
         </p:nvSpPr>
         <p:spPr>
           <a:xfrm>
-            <a:off x="508000" y="3022999"/>
+            <a:off x="508000" y="2872975"/>
             <a:ext cx="3840480" cy="274320"/>
           </a:xfrm>
           <a:prstGeom prst="rect">
@@ -26894,7 +27281,7 @@
                 <a:ea typeface="Calibri" pitchFamily="34" charset="-122"/>
                 <a:cs typeface="Calibri" pitchFamily="34" charset="-120"/>
               </a:rPr>
-              <a:t>Deep Q-Network</a:t>
+              <a:t>Deep Q-Network (DQN)</a:t>
             </a:r>
             <a:endParaRPr lang="en-US" dirty="0"/>
           </a:p>
@@ -26915,14 +27302,14 @@
           <p:nvPr/>
         </p:nvPicPr>
         <p:blipFill>
-          <a:blip r:embed="rId6"/>
+          <a:blip r:embed="rId5"/>
           <a:stretch>
             <a:fillRect/>
           </a:stretch>
         </p:blipFill>
         <p:spPr>
           <a:xfrm>
-            <a:off x="583662" y="1763842"/>
+            <a:off x="4739815" y="1119154"/>
             <a:ext cx="3988338" cy="354014"/>
           </a:xfrm>
           <a:prstGeom prst="rect">
@@ -26965,31 +27352,161 @@
               <a:buFontTx/>
               <a:buChar char="•"/>
             </a:pPr>
+            <a:endParaRPr lang="en-US" sz="1300" b="1" dirty="0">
+              <a:solidFill>
+                <a:srgbClr val="1A1A1A"/>
+              </a:solidFill>
+              <a:latin typeface="Calibri" pitchFamily="34" charset="0"/>
+              <a:ea typeface="Calibri" pitchFamily="34" charset="-122"/>
+              <a:cs typeface="Calibri" pitchFamily="34" charset="-120"/>
+            </a:endParaRPr>
+          </a:p>
+        </p:txBody>
+      </p:sp>
+      <p:sp>
+        <p:nvSpPr>
+          <p:cNvPr id="2" name="Shape 22">
+            <a:extLst>
+              <a:ext uri="{FF2B5EF4-FFF2-40B4-BE49-F238E27FC236}">
+                <a16:creationId xmlns:a16="http://schemas.microsoft.com/office/drawing/2014/main" id="{F59E8445-BA8A-5DD9-4838-EB1A6ACB8885}"/>
+              </a:ext>
+            </a:extLst>
+          </p:cNvPr>
+          <p:cNvSpPr/>
+          <p:nvPr/>
+        </p:nvSpPr>
+        <p:spPr>
+          <a:xfrm>
+            <a:off x="4782678" y="2038290"/>
+            <a:ext cx="4002609" cy="1118195"/>
+          </a:xfrm>
+          <a:prstGeom prst="rect">
+            <a:avLst/>
+          </a:prstGeom>
+          <a:noFill/>
+          <a:ln w="12700">
+            <a:solidFill>
+              <a:srgbClr val="D6E4F0"/>
+            </a:solidFill>
+            <a:prstDash val="solid"/>
+          </a:ln>
+        </p:spPr>
+      </p:sp>
+      <p:sp>
+        <p:nvSpPr>
+          <p:cNvPr id="4" name="Shape 22">
+            <a:extLst>
+              <a:ext uri="{FF2B5EF4-FFF2-40B4-BE49-F238E27FC236}">
+                <a16:creationId xmlns:a16="http://schemas.microsoft.com/office/drawing/2014/main" id="{DCB73271-015B-F599-011D-62CE9FA8D4F1}"/>
+              </a:ext>
+            </a:extLst>
+          </p:cNvPr>
+          <p:cNvSpPr/>
+          <p:nvPr/>
+        </p:nvSpPr>
+        <p:spPr>
+          <a:xfrm>
+            <a:off x="4782678" y="3515256"/>
+            <a:ext cx="4002609" cy="1118195"/>
+          </a:xfrm>
+          <a:prstGeom prst="rect">
+            <a:avLst/>
+          </a:prstGeom>
+          <a:noFill/>
+          <a:ln w="12700">
+            <a:solidFill>
+              <a:srgbClr val="D6E4F0"/>
+            </a:solidFill>
+            <a:prstDash val="solid"/>
+          </a:ln>
+        </p:spPr>
+      </p:sp>
+      <p:sp>
+        <p:nvSpPr>
+          <p:cNvPr id="5" name="Text 7">
+            <a:extLst>
+              <a:ext uri="{FF2B5EF4-FFF2-40B4-BE49-F238E27FC236}">
+                <a16:creationId xmlns:a16="http://schemas.microsoft.com/office/drawing/2014/main" id="{CDC299C5-A975-D889-4D40-871E336304D7}"/>
+              </a:ext>
+            </a:extLst>
+          </p:cNvPr>
+          <p:cNvSpPr/>
+          <p:nvPr/>
+        </p:nvSpPr>
+        <p:spPr>
+          <a:xfrm>
+            <a:off x="4750690" y="881123"/>
+            <a:ext cx="3954922" cy="274320"/>
+          </a:xfrm>
+          <a:prstGeom prst="rect">
+            <a:avLst/>
+          </a:prstGeom>
+          <a:noFill/>
+          <a:ln/>
+        </p:spPr>
+        <p:txBody>
+          <a:bodyPr wrap="square" rtlCol="0" anchor="ctr"/>
+          <a:lstStyle/>
+          <a:p>
+            <a:pPr marL="0" indent="0">
+              <a:buNone/>
+            </a:pPr>
             <a:r>
-              <a:rPr lang="en-US" sz="1300" dirty="0">
+              <a:rPr lang="en-US" sz="1100" i="1" dirty="0">
                 <a:solidFill>
-                  <a:srgbClr val="1A1A1A"/>
+                  <a:schemeClr val="tx1">
+                    <a:lumMod val="65000"/>
+                    <a:lumOff val="35000"/>
+                  </a:schemeClr>
                 </a:solidFill>
                 <a:latin typeface="Calibri" pitchFamily="34" charset="0"/>
                 <a:ea typeface="Calibri" pitchFamily="34" charset="-122"/>
                 <a:cs typeface="Calibri" pitchFamily="34" charset="-120"/>
               </a:rPr>
-              <a:t>In Q-learning the Q-function is encoded in a table called </a:t>
+              <a:t>Q-Algorithm</a:t>
             </a:r>
-            <a:r>
-              <a:rPr lang="en-US" sz="1300" b="1" dirty="0">
-                <a:solidFill>
-                  <a:srgbClr val="1A1A1A"/>
-                </a:solidFill>
-                <a:latin typeface="Calibri" pitchFamily="34" charset="0"/>
-                <a:ea typeface="Calibri" pitchFamily="34" charset="-122"/>
-                <a:cs typeface="Calibri" pitchFamily="34" charset="-120"/>
-              </a:rPr>
-              <a:t>Q-table</a:t>
-            </a:r>
+            <a:endParaRPr lang="en-US" sz="1100" i="1" dirty="0">
+              <a:solidFill>
+                <a:schemeClr val="tx1">
+                  <a:lumMod val="65000"/>
+                  <a:lumOff val="35000"/>
+                </a:schemeClr>
+              </a:solidFill>
+            </a:endParaRPr>
           </a:p>
         </p:txBody>
       </p:sp>
+      <p:pic>
+        <p:nvPicPr>
+          <p:cNvPr id="7" name="Immagine 6">
+            <a:extLst>
+              <a:ext uri="{FF2B5EF4-FFF2-40B4-BE49-F238E27FC236}">
+                <a16:creationId xmlns:a16="http://schemas.microsoft.com/office/drawing/2014/main" id="{1463F26B-8A19-3D34-2B5F-CEB841A4DFF6}"/>
+              </a:ext>
+            </a:extLst>
+          </p:cNvPr>
+          <p:cNvPicPr>
+            <a:picLocks noChangeAspect="1"/>
+          </p:cNvPicPr>
+          <p:nvPr/>
+        </p:nvPicPr>
+        <p:blipFill>
+          <a:blip r:embed="rId6"/>
+          <a:srcRect l="38267" t="76940" b="2996"/>
+          <a:stretch>
+            <a:fillRect/>
+          </a:stretch>
+        </p:blipFill>
+        <p:spPr>
+          <a:xfrm>
+            <a:off x="6163547" y="1423161"/>
+            <a:ext cx="2503611" cy="274320"/>
+          </a:xfrm>
+          <a:prstGeom prst="rect">
+            <a:avLst/>
+          </a:prstGeom>
+        </p:spPr>
+      </p:pic>
       <p:sp>
         <p:nvSpPr>
           <p:cNvPr id="24" name="Shape 22">
@@ -27004,8 +27521,8 @@
         </p:nvSpPr>
         <p:spPr>
           <a:xfrm>
-            <a:off x="626525" y="1757543"/>
-            <a:ext cx="4002609" cy="608736"/>
+            <a:off x="4782678" y="1112855"/>
+            <a:ext cx="4002609" cy="572514"/>
           </a:xfrm>
           <a:prstGeom prst="rect">
             <a:avLst/>
@@ -27018,6 +27535,116 @@
             <a:prstDash val="solid"/>
           </a:ln>
         </p:spPr>
+      </p:sp>
+      <p:sp>
+        <p:nvSpPr>
+          <p:cNvPr id="6" name="Text 7">
+            <a:extLst>
+              <a:ext uri="{FF2B5EF4-FFF2-40B4-BE49-F238E27FC236}">
+                <a16:creationId xmlns:a16="http://schemas.microsoft.com/office/drawing/2014/main" id="{E08117A5-0A33-FEBA-F812-89D4BC048DFE}"/>
+              </a:ext>
+            </a:extLst>
+          </p:cNvPr>
+          <p:cNvSpPr/>
+          <p:nvPr/>
+        </p:nvSpPr>
+        <p:spPr>
+          <a:xfrm>
+            <a:off x="4724402" y="1813961"/>
+            <a:ext cx="3954922" cy="274320"/>
+          </a:xfrm>
+          <a:prstGeom prst="rect">
+            <a:avLst/>
+          </a:prstGeom>
+          <a:noFill/>
+          <a:ln/>
+        </p:spPr>
+        <p:txBody>
+          <a:bodyPr wrap="square" rtlCol="0" anchor="ctr"/>
+          <a:lstStyle/>
+          <a:p>
+            <a:pPr marL="0" indent="0">
+              <a:buNone/>
+            </a:pPr>
+            <a:r>
+              <a:rPr lang="en-US" sz="1100" i="1" dirty="0">
+                <a:solidFill>
+                  <a:schemeClr val="tx1">
+                    <a:lumMod val="65000"/>
+                    <a:lumOff val="35000"/>
+                  </a:schemeClr>
+                </a:solidFill>
+                <a:latin typeface="Calibri" pitchFamily="34" charset="0"/>
+                <a:ea typeface="Calibri" pitchFamily="34" charset="-122"/>
+                <a:cs typeface="Calibri" pitchFamily="34" charset="-120"/>
+              </a:rPr>
+              <a:t>Q-Table</a:t>
+            </a:r>
+            <a:endParaRPr lang="en-US" sz="1100" i="1" dirty="0">
+              <a:solidFill>
+                <a:schemeClr val="tx1">
+                  <a:lumMod val="65000"/>
+                  <a:lumOff val="35000"/>
+                </a:schemeClr>
+              </a:solidFill>
+            </a:endParaRPr>
+          </a:p>
+        </p:txBody>
+      </p:sp>
+      <p:sp>
+        <p:nvSpPr>
+          <p:cNvPr id="10" name="Text 7">
+            <a:extLst>
+              <a:ext uri="{FF2B5EF4-FFF2-40B4-BE49-F238E27FC236}">
+                <a16:creationId xmlns:a16="http://schemas.microsoft.com/office/drawing/2014/main" id="{A8E77933-013A-F08E-57B1-4DAF24CBE2F5}"/>
+              </a:ext>
+            </a:extLst>
+          </p:cNvPr>
+          <p:cNvSpPr/>
+          <p:nvPr/>
+        </p:nvSpPr>
+        <p:spPr>
+          <a:xfrm>
+            <a:off x="4782679" y="3286721"/>
+            <a:ext cx="3954922" cy="274320"/>
+          </a:xfrm>
+          <a:prstGeom prst="rect">
+            <a:avLst/>
+          </a:prstGeom>
+          <a:noFill/>
+          <a:ln/>
+        </p:spPr>
+        <p:txBody>
+          <a:bodyPr wrap="square" rtlCol="0" anchor="ctr"/>
+          <a:lstStyle/>
+          <a:p>
+            <a:pPr marL="0" indent="0">
+              <a:buNone/>
+            </a:pPr>
+            <a:r>
+              <a:rPr lang="en-US" sz="1100" i="1" dirty="0">
+                <a:solidFill>
+                  <a:schemeClr val="tx1">
+                    <a:lumMod val="65000"/>
+                    <a:lumOff val="35000"/>
+                  </a:schemeClr>
+                </a:solidFill>
+                <a:latin typeface="Calibri" pitchFamily="34" charset="0"/>
+                <a:ea typeface="Calibri" pitchFamily="34" charset="-122"/>
+                <a:cs typeface="Calibri" pitchFamily="34" charset="-120"/>
+              </a:rPr>
+              <a:t>Q-Network</a:t>
+            </a:r>
+            <a:endParaRPr lang="en-US" sz="1100" i="1" dirty="0">
+              <a:solidFill>
+                <a:schemeClr val="tx1">
+                  <a:lumMod val="65000"/>
+                  <a:lumOff val="35000"/>
+                </a:schemeClr>
+              </a:solidFill>
+            </a:endParaRPr>
+          </a:p>
+        </p:txBody>
       </p:sp>
     </p:spTree>
     <p:extLst>
@@ -27049,45 +27676,6 @@
           <a:chExt cx="0" cy="0"/>
         </a:xfrm>
       </p:grpSpPr>
-      <p:sp>
-        <p:nvSpPr>
-          <p:cNvPr id="3" name="Text 1"/>
-          <p:cNvSpPr/>
-          <p:nvPr/>
-        </p:nvSpPr>
-        <p:spPr>
-          <a:xfrm>
-            <a:off x="8412480" y="4846320"/>
-            <a:ext cx="457200" cy="201168"/>
-          </a:xfrm>
-          <a:prstGeom prst="rect">
-            <a:avLst/>
-          </a:prstGeom>
-          <a:noFill/>
-          <a:ln/>
-        </p:spPr>
-        <p:txBody>
-          <a:bodyPr wrap="square" rtlCol="0" anchor="ctr"/>
-          <a:lstStyle/>
-          <a:p>
-            <a:pPr marL="0" indent="0" algn="r">
-              <a:buNone/>
-            </a:pPr>
-            <a:r>
-              <a:rPr lang="en-US" sz="900" dirty="0">
-                <a:solidFill>
-                  <a:srgbClr val="BBBBBB"/>
-                </a:solidFill>
-                <a:latin typeface="Calibri" pitchFamily="34" charset="0"/>
-                <a:ea typeface="Calibri" pitchFamily="34" charset="-122"/>
-                <a:cs typeface="Calibri" pitchFamily="34" charset="-120"/>
-              </a:rPr>
-              <a:t>7 / 17</a:t>
-            </a:r>
-            <a:endParaRPr lang="en-US" sz="900" dirty="0"/>
-          </a:p>
-        </p:txBody>
-      </p:sp>
       <p:sp>
         <p:nvSpPr>
           <p:cNvPr id="4" name="Shape 2"/>
